--- a/docs/provenance-deck.pptx
+++ b/docs/provenance-deck.pptx
@@ -4620,7 +4620,7 @@
                 <a:ea typeface="Calibri" pitchFamily="34" charset="-122"/>
                 <a:cs typeface="Calibri" pitchFamily="34" charset="-120"/>
               </a:rPr>
-              <a:t>17 deterministic checks against a real 3.67M-company MCA registry, offline</a:t>
+              <a:t>18 deterministic checks against a real 3.67M-company MCA registry, offline</a:t>
             </a:r>
             <a:endParaRPr lang="en-US" sz="1400" dirty="0"/>
           </a:p>
@@ -5799,7 +5799,7 @@
                 <a:ea typeface="Calibri" pitchFamily="34" charset="-122"/>
                 <a:cs typeface="Calibri" pitchFamily="34" charset="-120"/>
               </a:rPr>
-              <a:t>17 pure deterministic checks: checksums, date logic, registry cross-checks. Facts with one right answer never go to a model.</a:t>
+              <a:t>18 pure deterministic checks: checksums, date logic, registry cross-checks. Facts with one right answer never go to a model.</a:t>
             </a:r>
             <a:endParaRPr lang="en-US" sz="1150" dirty="0"/>
           </a:p>
@@ -9390,7 +9390,7 @@
                 <a:ea typeface="Calibri" pitchFamily="34" charset="-122"/>
                 <a:cs typeface="Calibri" pitchFamily="34" charset="-120"/>
               </a:rPr>
-              <a:t>Paste any documents as plain text — no format needed. The pipeline runs live: extraction, 17 checks, deliberation, verdict. We built for contradictions, not scenarios, so unseen input is the test we want.</a:t>
+              <a:t>Paste any documents as plain text — no format needed. The pipeline runs live: extraction, 18 checks, deliberation, verdict. We built for contradictions, not scenarios, so unseen input is the test we want.</a:t>
             </a:r>
             <a:endParaRPr lang="en-US" sz="1250" dirty="0"/>
           </a:p>

--- a/docs/provenance-deck.pptx
+++ b/docs/provenance-deck.pptx
@@ -17,9 +17,11 @@
     <p:sldId id="265" r:id="rId11"/>
     <p:sldId id="266" r:id="rId12"/>
     <p:sldId id="267" r:id="rId13"/>
+    <p:sldId id="268" r:id="rId14"/>
+    <p:sldId id="269" r:id="rId15"/>
   </p:sldIdLst>
   <p:notesMasterIdLst>
-    <p:notesMasterId r:id="rId14"/>
+    <p:notesMasterId r:id="rId16"/>
   </p:notesMasterIdLst>
   <p:sldSz cx="12192000" cy="6858000"/>
   <p:notesSz cx="6858000" cy="12192000"/>
@@ -601,7 +603,7 @@
           <a:p>
             <a:r>
               <a:rPr lang="en-US" dirty="0"/>
-              <a:t>This slide IS a scored criterion. Read the clone-dossier line aloud before anyone asks about photocopied genuine paperwork.</a:t>
+              <a:t>Concede the self-labeling BEFORE being asked — it converts the weakness into a credibility signal.</a:t>
             </a:r>
             <a:endParaRPr lang="en-US" dirty="0"/>
           </a:p>
@@ -689,7 +691,7 @@
           <a:p>
             <a:r>
               <a:rPr lang="en-US" dirty="0"/>
-              <a:t>If asked 'distributors ARE the channel': adversarial operators are an insider-threat problem; the ledger is OEM-reviewable, not self-graded. Details in the business note.</a:t>
+              <a:t>The harness found and fixed a real hole before shipping: an injected line could widen thin evidence into a GENUINE. Tell that story if asked — it proves the process.</a:t>
             </a:r>
             <a:endParaRPr lang="en-US" dirty="0"/>
           </a:p>
@@ -777,7 +779,7 @@
           <a:p>
             <a:r>
               <a:rPr lang="en-US" dirty="0"/>
-              <a:t>End on the invitation — the unseen case is the moment the whole build was designed for.</a:t>
+              <a:t>This slide IS a scored criterion. Read the clone-dossier line aloud before anyone asks about photocopied genuine paperwork.</a:t>
             </a:r>
             <a:endParaRPr lang="en-US" dirty="0"/>
           </a:p>
@@ -801,6 +803,182 @@
             <a:fld id="{F7021451-1387-4CA6-816F-3879F97B5CBC}" type="slidenum">
               <a:rPr lang="en-US"/>
               <a:t>12</a:t>
+            </a:fld>
+            <a:endParaRPr lang="en-US"/>
+          </a:p>
+        </p:txBody>
+      </p:sp>
+    </p:spTree>
+    <p:extLst>
+      <p:ext uri="{BB962C8B-B14F-4D97-AF65-F5344CB8AC3E}">
+        <p14:creationId xmlns:p14="http://schemas.microsoft.com/office/powerpoint/2010/main" val="1024086991"/>
+      </p:ext>
+    </p:extLst>
+  </p:cSld>
+  <p:clrMapOvr>
+    <a:masterClrMapping/>
+  </p:clrMapOvr>
+</p:notes>
+</file>
+
+<file path=ppt/notesSlides/notesSlide13.xml><?xml version="1.0" encoding="utf-8"?>
+<p:notes xmlns:a="http://schemas.openxmlformats.org/drawingml/2006/main" xmlns:r="http://schemas.openxmlformats.org/officeDocument/2006/relationships" xmlns:p="http://schemas.openxmlformats.org/presentationml/2006/main">
+  <p:cSld>
+    <p:spTree>
+      <p:nvGrpSpPr>
+        <p:cNvPr id="1" name=""/>
+        <p:cNvGrpSpPr/>
+        <p:nvPr/>
+      </p:nvGrpSpPr>
+      <p:grpSpPr>
+        <a:xfrm>
+          <a:off x="0" y="0"/>
+          <a:ext cx="0" cy="0"/>
+          <a:chOff x="0" y="0"/>
+          <a:chExt cx="0" cy="0"/>
+        </a:xfrm>
+      </p:grpSpPr>
+      <p:sp>
+        <p:nvSpPr>
+          <p:cNvPr id="2" name="Slide Image Placeholder 1"/>
+          <p:cNvSpPr>
+            <a:spLocks noGrp="1" noRot="1" noChangeAspect="1"/>
+          </p:cNvSpPr>
+          <p:nvPr>
+            <p:ph type="sldImg"/>
+          </p:nvPr>
+        </p:nvSpPr>
+        <p:spPr/>
+      </p:sp>
+      <p:sp>
+        <p:nvSpPr>
+          <p:cNvPr id="3" name="Notes Placeholder 2"/>
+          <p:cNvSpPr>
+            <a:spLocks noGrp="1"/>
+          </p:cNvSpPr>
+          <p:nvPr>
+            <p:ph type="body" idx="1"/>
+          </p:nvPr>
+        </p:nvSpPr>
+        <p:spPr/>
+        <p:txBody>
+          <a:bodyPr/>
+          <a:lstStyle/>
+          <a:p>
+            <a:r>
+              <a:rPr lang="en-US" dirty="0"/>
+              <a:t>If asked 'distributors ARE the channel': adversarial operators are an insider-threat problem; the ledger is OEM-reviewable, not self-graded. Details in the business note.</a:t>
+            </a:r>
+            <a:endParaRPr lang="en-US" dirty="0"/>
+          </a:p>
+        </p:txBody>
+      </p:sp>
+      <p:sp>
+        <p:nvSpPr>
+          <p:cNvPr id="4" name="Slide Number Placeholder 3"/>
+          <p:cNvSpPr>
+            <a:spLocks noGrp="1"/>
+          </p:cNvSpPr>
+          <p:nvPr>
+            <p:ph type="sldNum" sz="quarter" idx="10"/>
+          </p:nvPr>
+        </p:nvSpPr>
+        <p:spPr/>
+        <p:txBody>
+          <a:bodyPr/>
+          <a:lstStyle/>
+          <a:p>
+            <a:fld id="{F7021451-1387-4CA6-816F-3879F97B5CBC}" type="slidenum">
+              <a:rPr lang="en-US"/>
+              <a:t>13</a:t>
+            </a:fld>
+            <a:endParaRPr lang="en-US"/>
+          </a:p>
+        </p:txBody>
+      </p:sp>
+    </p:spTree>
+    <p:extLst>
+      <p:ext uri="{BB962C8B-B14F-4D97-AF65-F5344CB8AC3E}">
+        <p14:creationId xmlns:p14="http://schemas.microsoft.com/office/powerpoint/2010/main" val="1024086991"/>
+      </p:ext>
+    </p:extLst>
+  </p:cSld>
+  <p:clrMapOvr>
+    <a:masterClrMapping/>
+  </p:clrMapOvr>
+</p:notes>
+</file>
+
+<file path=ppt/notesSlides/notesSlide14.xml><?xml version="1.0" encoding="utf-8"?>
+<p:notes xmlns:a="http://schemas.openxmlformats.org/drawingml/2006/main" xmlns:r="http://schemas.openxmlformats.org/officeDocument/2006/relationships" xmlns:p="http://schemas.openxmlformats.org/presentationml/2006/main">
+  <p:cSld>
+    <p:spTree>
+      <p:nvGrpSpPr>
+        <p:cNvPr id="1" name=""/>
+        <p:cNvGrpSpPr/>
+        <p:nvPr/>
+      </p:nvGrpSpPr>
+      <p:grpSpPr>
+        <a:xfrm>
+          <a:off x="0" y="0"/>
+          <a:ext cx="0" cy="0"/>
+          <a:chOff x="0" y="0"/>
+          <a:chExt cx="0" cy="0"/>
+        </a:xfrm>
+      </p:grpSpPr>
+      <p:sp>
+        <p:nvSpPr>
+          <p:cNvPr id="2" name="Slide Image Placeholder 1"/>
+          <p:cNvSpPr>
+            <a:spLocks noGrp="1" noRot="1" noChangeAspect="1"/>
+          </p:cNvSpPr>
+          <p:nvPr>
+            <p:ph type="sldImg"/>
+          </p:nvPr>
+        </p:nvSpPr>
+        <p:spPr/>
+      </p:sp>
+      <p:sp>
+        <p:nvSpPr>
+          <p:cNvPr id="3" name="Notes Placeholder 2"/>
+          <p:cNvSpPr>
+            <a:spLocks noGrp="1"/>
+          </p:cNvSpPr>
+          <p:nvPr>
+            <p:ph type="body" idx="1"/>
+          </p:nvPr>
+        </p:nvSpPr>
+        <p:spPr/>
+        <p:txBody>
+          <a:bodyPr/>
+          <a:lstStyle/>
+          <a:p>
+            <a:r>
+              <a:rPr lang="en-US" dirty="0"/>
+              <a:t>End on the invitation — the unseen case is the moment the whole build was designed for.</a:t>
+            </a:r>
+            <a:endParaRPr lang="en-US" dirty="0"/>
+          </a:p>
+        </p:txBody>
+      </p:sp>
+      <p:sp>
+        <p:nvSpPr>
+          <p:cNvPr id="4" name="Slide Number Placeholder 3"/>
+          <p:cNvSpPr>
+            <a:spLocks noGrp="1"/>
+          </p:cNvSpPr>
+          <p:nvPr>
+            <p:ph type="sldNum" sz="quarter" idx="10"/>
+          </p:nvPr>
+        </p:nvSpPr>
+        <p:spPr/>
+        <p:txBody>
+          <a:bodyPr/>
+          <a:lstStyle/>
+          <a:p>
+            <a:fld id="{F7021451-1387-4CA6-816F-3879F97B5CBC}" type="slidenum">
+              <a:rPr lang="en-US"/>
+              <a:t>14</a:t>
             </a:fld>
             <a:endParaRPr lang="en-US"/>
           </a:p>
@@ -1481,7 +1659,7 @@
           <a:p>
             <a:r>
               <a:rPr lang="en-US" dirty="0"/>
-              <a:t>Concede the self-labeling BEFORE being asked — it converts the weakness into a credibility signal.</a:t>
+              <a:t>This generalizes the mentor's own exam questions (date + geography) into published-formula arithmetic. Fully offline, deterministic.</a:t>
             </a:r>
             <a:endParaRPr lang="en-US" dirty="0"/>
           </a:p>
@@ -2365,7 +2543,7 @@
                 <a:ea typeface="Courier New" pitchFamily="34" charset="-122"/>
                 <a:cs typeface="Courier New" pitchFamily="34" charset="-120"/>
               </a:rPr>
-              <a:t>known limits</a:t>
+              <a:t>calibration</a:t>
             </a:r>
             <a:endParaRPr lang="en-US" sz="1000" dirty="0"/>
           </a:p>
@@ -2404,7 +2582,7 @@
                 <a:ea typeface="Arial" pitchFamily="34" charset="-122"/>
                 <a:cs typeface="Arial" pitchFamily="34" charset="-120"/>
               </a:rPr>
-              <a:t>What this system cannot determine</a:t>
+              <a:t>Honest numbers, honestly framed</a:t>
             </a:r>
             <a:endParaRPr lang="en-US" sz="2800" dirty="0"/>
           </a:p>
@@ -2443,7 +2621,7 @@
                 <a:ea typeface="Calibri" pitchFamily="34" charset="-122"/>
                 <a:cs typeface="Calibri" pitchFamily="34" charset="-120"/>
               </a:rPr>
-              <a:t>Shipped as a case-aware block on every verdict — because knowing what you don't know is the brief</a:t>
+              <a:t>Our 12-case pack is an adversarial regression suite — the real eval is the case you feed it</a:t>
             </a:r>
             <a:endParaRPr lang="en-US" sz="1500" dirty="0"/>
           </a:p>
@@ -2451,170 +2629,22 @@
       </p:sp>
       <p:sp>
         <p:nvSpPr>
-          <p:cNvPr id="7" name="Text 5"/>
-          <p:cNvSpPr txBox="1"/>
+          <p:cNvPr id="7" name="Shape 5"/>
+          <p:cNvSpPr/>
           <p:nvPr/>
         </p:nvSpPr>
         <p:spPr>
           <a:xfrm>
             <a:off x="457200" y="1783080"/>
-            <a:ext cx="6858000" cy="3931920"/>
-          </a:xfrm>
-          <a:prstGeom prst="rect">
-            <a:avLst/>
-          </a:prstGeom>
-          <a:noFill/>
-          <a:ln/>
-        </p:spPr>
-        <p:txBody>
-          <a:bodyPr wrap="square" lIns="0" tIns="0" rIns="0" bIns="0" rtlCol="0" anchor="ctr"/>
-          <a:lstStyle/>
-          <a:p>
-            <a:pPr marL="342900" indent="-342900">
-              <a:spcAft>
-                <a:spcPts val="1000"/>
-              </a:spcAft>
-              <a:buSzPct val="100000"/>
-              <a:buChar char="–"/>
-            </a:pPr>
-            <a:r>
-              <a:rPr lang="en-US" sz="1400" dirty="0">
-                <a:solidFill>
-                  <a:srgbClr val="E8ECF1"/>
-                </a:solidFill>
-                <a:latin typeface="Calibri" pitchFamily="34" charset="0"/>
-                <a:ea typeface="Calibri" pitchFamily="34" charset="-122"/>
-                <a:cs typeface="Calibri" pitchFamily="34" charset="-120"/>
-              </a:rPr>
-              <a:t>Whether the physical part matches the paper — it reads documents, not metallurgy or holograms</a:t>
-            </a:r>
-            <a:endParaRPr lang="en-US" sz="1400" dirty="0"/>
-          </a:p>
-          <a:p>
-            <a:pPr marL="342900" indent="-342900">
-              <a:spcAft>
-                <a:spcPts val="1000"/>
-              </a:spcAft>
-              <a:buSzPct val="100000"/>
-              <a:buChar char="–"/>
-            </a:pPr>
-            <a:r>
-              <a:rPr lang="en-US" sz="1400" dirty="0">
-                <a:solidFill>
-                  <a:srgbClr val="E8ECF1"/>
-                </a:solidFill>
-                <a:latin typeface="Calibri" pitchFamily="34" charset="0"/>
-                <a:ea typeface="Calibri" pitchFamily="34" charset="-122"/>
-                <a:cs typeface="Calibri" pitchFamily="34" charset="-120"/>
-              </a:rPr>
-              <a:t>A byte-perfect clone of a genuine dossier — that needs a dossier-hash reuse registry (roadmap, layer two)</a:t>
-            </a:r>
-            <a:endParaRPr lang="en-US" sz="1400" dirty="0"/>
-          </a:p>
-          <a:p>
-            <a:pPr marL="342900" indent="-342900">
-              <a:spcAft>
-                <a:spcPts val="1000"/>
-              </a:spcAft>
-              <a:buSzPct val="100000"/>
-              <a:buChar char="–"/>
-            </a:pPr>
-            <a:r>
-              <a:rPr lang="en-US" sz="1400" dirty="0">
-                <a:solidFill>
-                  <a:srgbClr val="E8ECF1"/>
-                </a:solidFill>
-                <a:latin typeface="Calibri" pitchFamily="34" charset="0"/>
-                <a:ea typeface="Calibri" pitchFamily="34" charset="-122"/>
-                <a:cs typeface="Calibri" pitchFamily="34" charset="-120"/>
-              </a:rPr>
-              <a:t>Doctored document images — inputs arrive as text; pixel forensics is out of scope</a:t>
-            </a:r>
-            <a:endParaRPr lang="en-US" sz="1400" dirty="0"/>
-          </a:p>
-          <a:p>
-            <a:pPr marL="342900" indent="-342900">
-              <a:spcAft>
-                <a:spcPts val="1000"/>
-              </a:spcAft>
-              <a:buSzPct val="100000"/>
-              <a:buChar char="–"/>
-            </a:pPr>
-            <a:r>
-              <a:rPr lang="en-US" sz="1400" dirty="0">
-                <a:solidFill>
-                  <a:srgbClr val="E8ECF1"/>
-                </a:solidFill>
-                <a:latin typeface="Calibri" pitchFamily="34" charset="0"/>
-                <a:ea typeface="Calibri" pitchFamily="34" charset="-122"/>
-                <a:cs typeface="Calibri" pitchFamily="34" charset="-120"/>
-              </a:rPr>
-              <a:t>Events after the registry snapshot — declared with the snapshot date, never silently guessed</a:t>
-            </a:r>
-            <a:endParaRPr lang="en-US" sz="1400" dirty="0"/>
-          </a:p>
-          <a:p>
-            <a:pPr marL="342900" indent="-342900">
-              <a:spcAft>
-                <a:spcPts val="1000"/>
-              </a:spcAft>
-              <a:buSzPct val="100000"/>
-              <a:buChar char="–"/>
-            </a:pPr>
-            <a:r>
-              <a:rPr lang="en-US" sz="1400" dirty="0">
-                <a:solidFill>
-                  <a:srgbClr val="E8ECF1"/>
-                </a:solidFill>
-                <a:latin typeface="Calibri" pitchFamily="34" charset="0"/>
-                <a:ea typeface="Calibri" pitchFamily="34" charset="-122"/>
-                <a:cs typeface="Calibri" pitchFamily="34" charset="-120"/>
-              </a:rPr>
-              <a:t>Live BIS / GSTN status — offline stubs today, declared as such; live lookups where connectivity exists</a:t>
-            </a:r>
-            <a:endParaRPr lang="en-US" sz="1400" dirty="0"/>
-          </a:p>
-          <a:p>
-            <a:pPr marL="342900" indent="-342900">
-              <a:spcAft>
-                <a:spcPts val="1000"/>
-              </a:spcAft>
-              <a:buSzPct val="100000"/>
-              <a:buChar char="–"/>
-            </a:pPr>
-            <a:r>
-              <a:rPr lang="en-US" sz="1400" dirty="0">
-                <a:solidFill>
-                  <a:srgbClr val="E8ECF1"/>
-                </a:solidFill>
-                <a:latin typeface="Calibri" pitchFamily="34" charset="0"/>
-                <a:ea typeface="Calibri" pitchFamily="34" charset="-122"/>
-                <a:cs typeface="Calibri" pitchFamily="34" charset="-120"/>
-              </a:rPr>
-              <a:t>Intent — a failed check proves an inconsistency, not who created it or why</a:t>
-            </a:r>
-            <a:endParaRPr lang="en-US" sz="1400" dirty="0"/>
-          </a:p>
-        </p:txBody>
-      </p:sp>
-      <p:sp>
-        <p:nvSpPr>
-          <p:cNvPr id="8" name="Shape 6"/>
-          <p:cNvSpPr/>
-          <p:nvPr/>
-        </p:nvSpPr>
-        <p:spPr>
-          <a:xfrm>
-            <a:off x="7680960" y="1783080"/>
-            <a:ext cx="4023360" cy="3931920"/>
+            <a:ext cx="3657600" cy="2011680"/>
           </a:xfrm>
           <a:prstGeom prst="roundRect">
             <a:avLst>
-              <a:gd name="adj" fmla="val 2326"/>
+              <a:gd name="adj" fmla="val 4545"/>
             </a:avLst>
           </a:prstGeom>
           <a:solidFill>
-            <a:srgbClr val="1B2536"/>
+            <a:srgbClr val="151D2C"/>
           </a:solidFill>
           <a:ln w="12700">
             <a:solidFill>
@@ -2626,73 +2656,69 @@
       </p:sp>
       <p:sp>
         <p:nvSpPr>
+          <p:cNvPr id="8" name="Text 6"/>
+          <p:cNvSpPr txBox="1"/>
+          <p:nvPr/>
+        </p:nvSpPr>
+        <p:spPr>
+          <a:xfrm>
+            <a:off x="685800" y="2011680"/>
+            <a:ext cx="3200400" cy="868680"/>
+          </a:xfrm>
+          <a:prstGeom prst="rect">
+            <a:avLst/>
+          </a:prstGeom>
+          <a:noFill/>
+          <a:ln/>
+        </p:spPr>
+        <p:txBody>
+          <a:bodyPr wrap="square" lIns="0" tIns="0" rIns="0" bIns="0" rtlCol="0" anchor="ctr"/>
+          <a:lstStyle/>
+          <a:p>
+            <a:pPr indent="0" marL="0">
+              <a:buNone/>
+            </a:pPr>
+            <a:r>
+              <a:rPr lang="en-US" sz="4400" b="1" dirty="0">
+                <a:solidFill>
+                  <a:srgbClr val="3FB950"/>
+                </a:solidFill>
+                <a:latin typeface="Arial" pitchFamily="34" charset="0"/>
+                <a:ea typeface="Arial" pitchFamily="34" charset="-122"/>
+                <a:cs typeface="Arial" pitchFamily="34" charset="-120"/>
+              </a:rPr>
+              <a:t>12/12</a:t>
+            </a:r>
+            <a:endParaRPr lang="en-US" sz="4400" dirty="0"/>
+          </a:p>
+        </p:txBody>
+      </p:sp>
+      <p:sp>
+        <p:nvSpPr>
           <p:cNvPr id="9" name="Text 7"/>
           <p:cNvSpPr txBox="1"/>
           <p:nvPr/>
         </p:nvSpPr>
         <p:spPr>
           <a:xfrm>
-            <a:off x="7955280" y="2011680"/>
-            <a:ext cx="3474720" cy="365760"/>
-          </a:xfrm>
-          <a:prstGeom prst="rect">
-            <a:avLst/>
-          </a:prstGeom>
-          <a:noFill/>
-          <a:ln/>
-        </p:spPr>
-        <p:txBody>
-          <a:bodyPr wrap="square" lIns="0" tIns="0" rIns="0" bIns="0" rtlCol="0" anchor="ctr"/>
-          <a:lstStyle/>
-          <a:p>
-            <a:pPr indent="0" marL="0">
-              <a:buNone/>
-            </a:pPr>
-            <a:r>
-              <a:rPr lang="en-US" sz="1300" b="1" spc="100" kern="0" dirty="0">
-                <a:solidFill>
-                  <a:srgbClr val="D9A23C"/>
-                </a:solidFill>
-                <a:latin typeface="Courier New" pitchFamily="34" charset="0"/>
-                <a:ea typeface="Courier New" pitchFamily="34" charset="-122"/>
-                <a:cs typeface="Courier New" pitchFamily="34" charset="-120"/>
-              </a:rPr>
-              <a:t>NAMED ROADMAP</a:t>
-            </a:r>
-            <a:endParaRPr lang="en-US" sz="1300" dirty="0"/>
-          </a:p>
-        </p:txBody>
-      </p:sp>
-      <p:sp>
-        <p:nvSpPr>
-          <p:cNvPr id="10" name="Text 8"/>
-          <p:cNvSpPr txBox="1"/>
-          <p:nvPr/>
-        </p:nvSpPr>
-        <p:spPr>
-          <a:xfrm>
-            <a:off x="7955280" y="2468880"/>
-            <a:ext cx="3474720" cy="3017520"/>
-          </a:xfrm>
-          <a:prstGeom prst="rect">
-            <a:avLst/>
-          </a:prstGeom>
-          <a:noFill/>
-          <a:ln/>
-        </p:spPr>
-        <p:txBody>
-          <a:bodyPr wrap="square" lIns="0" tIns="0" rIns="0" bIns="0" rtlCol="0" anchor="ctr"/>
-          <a:lstStyle/>
-          <a:p>
-            <a:pPr marL="342900" indent="-342900">
-              <a:spcAft>
-                <a:spcPts val="800"/>
-              </a:spcAft>
-              <a:buSzPct val="100000"/>
-              <a:buChar char="–"/>
-            </a:pPr>
-            <a:r>
-              <a:rPr lang="en-US" sz="1350" dirty="0">
+            <a:off x="685800" y="2926080"/>
+            <a:ext cx="3200400" cy="777240"/>
+          </a:xfrm>
+          <a:prstGeom prst="rect">
+            <a:avLst/>
+          </a:prstGeom>
+          <a:noFill/>
+          <a:ln/>
+        </p:spPr>
+        <p:txBody>
+          <a:bodyPr wrap="square" lIns="0" tIns="0" rIns="0" bIns="0" rtlCol="0" anchor="ctr"/>
+          <a:lstStyle/>
+          <a:p>
+            <a:pPr indent="0" marL="0">
+              <a:buNone/>
+            </a:pPr>
+            <a:r>
+              <a:rPr lang="en-US" sz="1250" dirty="0">
                 <a:solidFill>
                   <a:srgbClr val="8B94A3"/>
                 </a:solidFill>
@@ -2700,20 +2726,104 @@
                 <a:ea typeface="Calibri" pitchFamily="34" charset="-122"/>
                 <a:cs typeface="Calibri" pitchFamily="34" charset="-120"/>
               </a:rPr>
-              <a:t>Dossier-hash / lot-reuse detection</a:t>
-            </a:r>
-            <a:endParaRPr lang="en-US" sz="1350" dirty="0"/>
-          </a:p>
-          <a:p>
-            <a:pPr marL="342900" indent="-342900">
-              <a:spcAft>
-                <a:spcPts val="800"/>
-              </a:spcAft>
-              <a:buSzPct val="100000"/>
-              <a:buChar char="–"/>
-            </a:pPr>
-            <a:r>
-              <a:rPr lang="en-US" sz="1350" dirty="0">
+              <a:t>exact verdict + subtype — identical on mock AND the live LLM path, temperature 0</a:t>
+            </a:r>
+            <a:endParaRPr lang="en-US" sz="1250" dirty="0"/>
+          </a:p>
+        </p:txBody>
+      </p:sp>
+      <p:sp>
+        <p:nvSpPr>
+          <p:cNvPr id="10" name="Shape 8"/>
+          <p:cNvSpPr/>
+          <p:nvPr/>
+        </p:nvSpPr>
+        <p:spPr>
+          <a:xfrm>
+            <a:off x="4370832" y="1783080"/>
+            <a:ext cx="3657600" cy="2011680"/>
+          </a:xfrm>
+          <a:prstGeom prst="roundRect">
+            <a:avLst>
+              <a:gd name="adj" fmla="val 4545"/>
+            </a:avLst>
+          </a:prstGeom>
+          <a:solidFill>
+            <a:srgbClr val="151D2C"/>
+          </a:solidFill>
+          <a:ln w="12700">
+            <a:solidFill>
+              <a:srgbClr val="273349"/>
+            </a:solidFill>
+            <a:prstDash val="solid"/>
+          </a:ln>
+        </p:spPr>
+      </p:sp>
+      <p:sp>
+        <p:nvSpPr>
+          <p:cNvPr id="11" name="Text 9"/>
+          <p:cNvSpPr txBox="1"/>
+          <p:nvPr/>
+        </p:nvSpPr>
+        <p:spPr>
+          <a:xfrm>
+            <a:off x="4599432" y="2011680"/>
+            <a:ext cx="3200400" cy="868680"/>
+          </a:xfrm>
+          <a:prstGeom prst="rect">
+            <a:avLst/>
+          </a:prstGeom>
+          <a:noFill/>
+          <a:ln/>
+        </p:spPr>
+        <p:txBody>
+          <a:bodyPr wrap="square" lIns="0" tIns="0" rIns="0" bIns="0" rtlCol="0" anchor="ctr"/>
+          <a:lstStyle/>
+          <a:p>
+            <a:pPr indent="0" marL="0">
+              <a:buNone/>
+            </a:pPr>
+            <a:r>
+              <a:rPr lang="en-US" sz="4400" b="1" dirty="0">
+                <a:solidFill>
+                  <a:srgbClr val="D9A23C"/>
+                </a:solidFill>
+                <a:latin typeface="Arial" pitchFamily="34" charset="0"/>
+                <a:ea typeface="Arial" pitchFamily="34" charset="-122"/>
+                <a:cs typeface="Arial" pitchFamily="34" charset="-120"/>
+              </a:rPr>
+              <a:t>33%</a:t>
+            </a:r>
+            <a:endParaRPr lang="en-US" sz="4400" dirty="0"/>
+          </a:p>
+        </p:txBody>
+      </p:sp>
+      <p:sp>
+        <p:nvSpPr>
+          <p:cNvPr id="12" name="Text 10"/>
+          <p:cNvSpPr txBox="1"/>
+          <p:nvPr/>
+        </p:nvSpPr>
+        <p:spPr>
+          <a:xfrm>
+            <a:off x="4599432" y="2926080"/>
+            <a:ext cx="3200400" cy="777240"/>
+          </a:xfrm>
+          <a:prstGeom prst="rect">
+            <a:avLst/>
+          </a:prstGeom>
+          <a:noFill/>
+          <a:ln/>
+        </p:spPr>
+        <p:txBody>
+          <a:bodyPr wrap="square" lIns="0" tIns="0" rIns="0" bIns="0" rtlCol="0" anchor="ctr"/>
+          <a:lstStyle/>
+          <a:p>
+            <a:pPr indent="0" marL="0">
+              <a:buNone/>
+            </a:pPr>
+            <a:r>
+              <a:rPr lang="en-US" sz="1250" dirty="0">
                 <a:solidFill>
                   <a:srgbClr val="8B94A3"/>
                 </a:solidFill>
@@ -2721,20 +2831,104 @@
                 <a:ea typeface="Calibri" pitchFamily="34" charset="-122"/>
                 <a:cs typeface="Calibri" pitchFamily="34" charset="-120"/>
               </a:rPr>
-              <a:t>Live BIS + GSTN integration</a:t>
-            </a:r>
-            <a:endParaRPr lang="en-US" sz="1350" dirty="0"/>
-          </a:p>
-          <a:p>
-            <a:pPr marL="342900" indent="-342900">
-              <a:spcAft>
-                <a:spcPts val="800"/>
-              </a:spcAft>
-              <a:buSzPct val="100000"/>
-              <a:buChar char="–"/>
-            </a:pPr>
-            <a:r>
-              <a:rPr lang="en-US" sz="1350" dirty="0">
+              <a:t>abstention rate — UNVERIFIABLE with a work order instead of a guess</a:t>
+            </a:r>
+            <a:endParaRPr lang="en-US" sz="1250" dirty="0"/>
+          </a:p>
+        </p:txBody>
+      </p:sp>
+      <p:sp>
+        <p:nvSpPr>
+          <p:cNvPr id="13" name="Shape 11"/>
+          <p:cNvSpPr/>
+          <p:nvPr/>
+        </p:nvSpPr>
+        <p:spPr>
+          <a:xfrm>
+            <a:off x="8284464" y="1783080"/>
+            <a:ext cx="3657600" cy="2011680"/>
+          </a:xfrm>
+          <a:prstGeom prst="roundRect">
+            <a:avLst>
+              <a:gd name="adj" fmla="val 4545"/>
+            </a:avLst>
+          </a:prstGeom>
+          <a:solidFill>
+            <a:srgbClr val="151D2C"/>
+          </a:solidFill>
+          <a:ln w="12700">
+            <a:solidFill>
+              <a:srgbClr val="273349"/>
+            </a:solidFill>
+            <a:prstDash val="solid"/>
+          </a:ln>
+        </p:spPr>
+      </p:sp>
+      <p:sp>
+        <p:nvSpPr>
+          <p:cNvPr id="14" name="Text 12"/>
+          <p:cNvSpPr txBox="1"/>
+          <p:nvPr/>
+        </p:nvSpPr>
+        <p:spPr>
+          <a:xfrm>
+            <a:off x="8513064" y="2011680"/>
+            <a:ext cx="3200400" cy="868680"/>
+          </a:xfrm>
+          <a:prstGeom prst="rect">
+            <a:avLst/>
+          </a:prstGeom>
+          <a:noFill/>
+          <a:ln/>
+        </p:spPr>
+        <p:txBody>
+          <a:bodyPr wrap="square" lIns="0" tIns="0" rIns="0" bIns="0" rtlCol="0" anchor="ctr"/>
+          <a:lstStyle/>
+          <a:p>
+            <a:pPr indent="0" marL="0">
+              <a:buNone/>
+            </a:pPr>
+            <a:r>
+              <a:rPr lang="en-US" sz="4400" b="1" dirty="0">
+                <a:solidFill>
+                  <a:srgbClr val="4D9FFF"/>
+                </a:solidFill>
+                <a:latin typeface="Arial" pitchFamily="34" charset="0"/>
+                <a:ea typeface="Arial" pitchFamily="34" charset="-122"/>
+                <a:cs typeface="Arial" pitchFamily="34" charset="-120"/>
+              </a:rPr>
+              <a:t>100%</a:t>
+            </a:r>
+            <a:endParaRPr lang="en-US" sz="4400" dirty="0"/>
+          </a:p>
+        </p:txBody>
+      </p:sp>
+      <p:sp>
+        <p:nvSpPr>
+          <p:cNvPr id="15" name="Text 13"/>
+          <p:cNvSpPr txBox="1"/>
+          <p:nvPr/>
+        </p:nvSpPr>
+        <p:spPr>
+          <a:xfrm>
+            <a:off x="8513064" y="2926080"/>
+            <a:ext cx="3200400" cy="777240"/>
+          </a:xfrm>
+          <a:prstGeom prst="rect">
+            <a:avLst/>
+          </a:prstGeom>
+          <a:noFill/>
+          <a:ln/>
+        </p:spPr>
+        <p:txBody>
+          <a:bodyPr wrap="square" lIns="0" tIns="0" rIns="0" bIns="0" rtlCol="0" anchor="ctr"/>
+          <a:lstStyle/>
+          <a:p>
+            <a:pPr indent="0" marL="0">
+              <a:buNone/>
+            </a:pPr>
+            <a:r>
+              <a:rPr lang="en-US" sz="1250" dirty="0">
                 <a:solidFill>
                   <a:srgbClr val="8B94A3"/>
                 </a:solidFill>
@@ -2742,38 +2936,52 @@
                 <a:ea typeface="Calibri" pitchFamily="34" charset="-122"/>
                 <a:cs typeface="Calibri" pitchFamily="34" charset="-120"/>
               </a:rPr>
-              <a:t>Multi-party dossier verification</a:t>
-            </a:r>
-            <a:endParaRPr lang="en-US" sz="1350" dirty="0"/>
-          </a:p>
-          <a:p>
-            <a:pPr marL="342900" indent="-342900">
-              <a:spcAft>
-                <a:spcPts val="800"/>
-              </a:spcAft>
-              <a:buSzPct val="100000"/>
-              <a:buChar char="–"/>
-            </a:pPr>
-            <a:r>
-              <a:rPr lang="en-US" sz="1350" dirty="0">
-                <a:solidFill>
-                  <a:srgbClr val="8B94A3"/>
+              <a:t>accuracy when committed — every GENUINE / SUSPECT call correct</a:t>
+            </a:r>
+            <a:endParaRPr lang="en-US" sz="1250" dirty="0"/>
+          </a:p>
+        </p:txBody>
+      </p:sp>
+      <p:sp>
+        <p:nvSpPr>
+          <p:cNvPr id="16" name="Text 14"/>
+          <p:cNvSpPr txBox="1"/>
+          <p:nvPr/>
+        </p:nvSpPr>
+        <p:spPr>
+          <a:xfrm>
+            <a:off x="457200" y="4160520"/>
+            <a:ext cx="11274552" cy="914400"/>
+          </a:xfrm>
+          <a:prstGeom prst="rect">
+            <a:avLst/>
+          </a:prstGeom>
+          <a:noFill/>
+          <a:ln/>
+        </p:spPr>
+        <p:txBody>
+          <a:bodyPr wrap="square" lIns="0" tIns="0" rIns="0" bIns="0" rtlCol="0" anchor="ctr"/>
+          <a:lstStyle/>
+          <a:p>
+            <a:pPr indent="0" marL="0">
+              <a:buNone/>
+            </a:pPr>
+            <a:r>
+              <a:rPr lang="en-US" sz="1400" b="1" dirty="0">
+                <a:solidFill>
+                  <a:srgbClr val="E8ECF1"/>
                 </a:solidFill>
                 <a:latin typeface="Calibri" pitchFamily="34" charset="0"/>
                 <a:ea typeface="Calibri" pitchFamily="34" charset="-122"/>
                 <a:cs typeface="Calibri" pitchFamily="34" charset="-120"/>
               </a:rPr>
-              <a:t>Nightly registry sync</a:t>
-            </a:r>
-            <a:endParaRPr lang="en-US" sz="1350" dirty="0"/>
-          </a:p>
-          <a:p>
-            <a:pPr marL="342900" indent="-342900">
-              <a:buSzPct val="100000"/>
-              <a:buChar char="–"/>
-            </a:pPr>
-            <a:r>
-              <a:rPr lang="en-US" sz="1350" dirty="0">
+              <a:t>What the suite actually contains: </a:t>
+            </a:r>
+            <a:pPr indent="0" marL="0">
+              <a:buNone/>
+            </a:pPr>
+            <a:r>
+              <a:rPr lang="en-US" sz="1400" dirty="0">
                 <a:solidFill>
                   <a:srgbClr val="8B94A3"/>
                 </a:solidFill>
@@ -2781,9 +2989,48 @@
                 <a:ea typeface="Calibri" pitchFamily="34" charset="-122"/>
                 <a:cs typeface="Calibri" pitchFamily="34" charset="-120"/>
               </a:rPr>
-              <a:t>OCR / document-image ingestion</a:t>
-            </a:r>
-            <a:endParaRPr lang="en-US" sz="1350" dirty="0"/>
+              <a:t>a typo'd lot code the system must NOT flag, an injection dossier, an LLP that must trigger abstention not accusation, and a merger where the scary reading is wrong. Rules-only scores 11/12 — its one miss, over-accusing the merged supplier, is the measured proof of what stage 4 adds.</a:t>
+            </a:r>
+            <a:endParaRPr lang="en-US" sz="1400" dirty="0"/>
+          </a:p>
+        </p:txBody>
+      </p:sp>
+      <p:sp>
+        <p:nvSpPr>
+          <p:cNvPr id="17" name="Text 15"/>
+          <p:cNvSpPr txBox="1"/>
+          <p:nvPr/>
+        </p:nvSpPr>
+        <p:spPr>
+          <a:xfrm>
+            <a:off x="457200" y="5120640"/>
+            <a:ext cx="11274552" cy="822960"/>
+          </a:xfrm>
+          <a:prstGeom prst="rect">
+            <a:avLst/>
+          </a:prstGeom>
+          <a:noFill/>
+          <a:ln/>
+        </p:spPr>
+        <p:txBody>
+          <a:bodyPr wrap="square" lIns="0" tIns="0" rIns="0" bIns="0" rtlCol="0" anchor="ctr"/>
+          <a:lstStyle/>
+          <a:p>
+            <a:pPr indent="0" marL="0">
+              <a:buNone/>
+            </a:pPr>
+            <a:r>
+              <a:rPr lang="en-US" sz="1300" i="1" dirty="0">
+                <a:solidFill>
+                  <a:srgbClr val="5C6470"/>
+                </a:solidFill>
+                <a:latin typeface="Calibri" pitchFamily="34" charset="0"/>
+                <a:ea typeface="Calibri" pitchFamily="34" charset="-122"/>
+                <a:cs typeface="Calibri" pitchFamily="34" charset="-120"/>
+              </a:rPr>
+              <a:t>Who labeled the cases? We did — and we say so. No labeled corpus of counterfeit dossiers exists; that absence is part of this problem. 12/12 proves the pipeline matches its stated policy exactly. Field accuracy is a different claim, and we don't make it.</a:t>
+            </a:r>
+            <a:endParaRPr lang="en-US" sz="1300" dirty="0"/>
           </a:p>
         </p:txBody>
       </p:sp>
@@ -2930,7 +3177,7 @@
                 <a:ea typeface="Courier New" pitchFamily="34" charset="-122"/>
                 <a:cs typeface="Courier New" pitchFamily="34" charset="-120"/>
               </a:rPr>
-              <a:t>business</a:t>
+              <a:t>we attacked our own exam</a:t>
             </a:r>
             <a:endParaRPr lang="en-US" sz="1000" dirty="0"/>
           </a:p>
@@ -2969,7 +3216,7 @@
                 <a:ea typeface="Arial" pitchFamily="34" charset="-122"/>
                 <a:cs typeface="Arial" pitchFamily="34" charset="-120"/>
               </a:rPr>
-              <a:t>The OEM pays. The distributor desk uses it.</a:t>
+              <a:t>306 mutations of our own test data. Zero false GENUINEs.</a:t>
             </a:r>
             <a:endParaRPr lang="en-US" sz="2800" dirty="0"/>
           </a:p>
@@ -3008,7 +3255,7 @@
                 <a:ea typeface="Calibri" pitchFamily="34" charset="-122"/>
                 <a:cs typeface="Calibri" pitchFamily="34" charset="-120"/>
               </a:rPr>
-              <a:t>Authorized distributors carry warranty liability — dossier screening becomes a channel-compliance mandate</a:t>
+              <a:t>The jury's unseen case is built from our data — so we rehearsed the mutation process itself</a:t>
             </a:r>
             <a:endParaRPr lang="en-US" sz="1500" dirty="0"/>
           </a:p>
@@ -3023,11 +3270,11 @@
         <p:spPr>
           <a:xfrm>
             <a:off x="457200" y="1783080"/>
-            <a:ext cx="11274552" cy="822960"/>
+            <a:ext cx="3657600" cy="2103120"/>
           </a:xfrm>
           <a:prstGeom prst="roundRect">
             <a:avLst>
-              <a:gd name="adj" fmla="val 8889"/>
+              <a:gd name="adj" fmla="val 4348"/>
             </a:avLst>
           </a:prstGeom>
           <a:solidFill>
@@ -3049,24 +3296,24 @@
         </p:nvSpPr>
         <p:spPr>
           <a:xfrm>
-            <a:off x="731520" y="1856232"/>
-            <a:ext cx="4206240" cy="676656"/>
-          </a:xfrm>
-          <a:prstGeom prst="rect">
-            <a:avLst/>
-          </a:prstGeom>
-          <a:noFill/>
-          <a:ln/>
-        </p:spPr>
-        <p:txBody>
-          <a:bodyPr wrap="square" lIns="0" tIns="0" rIns="0" bIns="0" rtlCol="0" anchor="ctr"/>
-          <a:lstStyle/>
-          <a:p>
-            <a:pPr indent="0" marL="0">
-              <a:buNone/>
-            </a:pPr>
-            <a:r>
-              <a:rPr lang="en-US" sz="1450" b="1" dirty="0">
+            <a:off x="685800" y="2011680"/>
+            <a:ext cx="3200400" cy="868680"/>
+          </a:xfrm>
+          <a:prstGeom prst="rect">
+            <a:avLst/>
+          </a:prstGeom>
+          <a:noFill/>
+          <a:ln/>
+        </p:spPr>
+        <p:txBody>
+          <a:bodyPr wrap="square" lIns="0" tIns="0" rIns="0" bIns="0" rtlCol="0" anchor="ctr"/>
+          <a:lstStyle/>
+          <a:p>
+            <a:pPr indent="0" marL="0">
+              <a:buNone/>
+            </a:pPr>
+            <a:r>
+              <a:rPr lang="en-US" sz="4400" b="1" dirty="0">
                 <a:solidFill>
                   <a:srgbClr val="4D9FFF"/>
                 </a:solidFill>
@@ -3074,9 +3321,9 @@
                 <a:ea typeface="Arial" pitchFamily="34" charset="-122"/>
                 <a:cs typeface="Arial" pitchFamily="34" charset="-120"/>
               </a:rPr>
-              <a:t>OEM brand protection</a:t>
-            </a:r>
-            <a:endParaRPr lang="en-US" sz="1450" dirty="0"/>
+              <a:t>306</a:t>
+            </a:r>
+            <a:endParaRPr lang="en-US" sz="4400" dirty="0"/>
           </a:p>
         </p:txBody>
       </p:sp>
@@ -3088,24 +3335,24 @@
         </p:nvSpPr>
         <p:spPr>
           <a:xfrm>
-            <a:off x="5120640" y="1856232"/>
-            <a:ext cx="6400800" cy="676656"/>
-          </a:xfrm>
-          <a:prstGeom prst="rect">
-            <a:avLst/>
-          </a:prstGeom>
-          <a:noFill/>
-          <a:ln/>
-        </p:spPr>
-        <p:txBody>
-          <a:bodyPr wrap="square" lIns="0" tIns="0" rIns="0" bIns="0" rtlCol="0" anchor="ctr"/>
-          <a:lstStyle/>
-          <a:p>
-            <a:pPr indent="0" marL="0">
-              <a:buNone/>
-            </a:pPr>
-            <a:r>
-              <a:rPr lang="en-US" sz="1250" dirty="0">
+            <a:off x="685800" y="2926080"/>
+            <a:ext cx="3200400" cy="868680"/>
+          </a:xfrm>
+          <a:prstGeom prst="rect">
+            <a:avLst/>
+          </a:prstGeom>
+          <a:noFill/>
+          <a:ln/>
+        </p:spPr>
+        <p:txBody>
+          <a:bodyPr wrap="square" lIns="0" tIns="0" rIns="0" bIns="0" rtlCol="0" anchor="ctr"/>
+          <a:lstStyle/>
+          <a:p>
+            <a:pPr indent="0" marL="0">
+              <a:buNone/>
+            </a:pPr>
+            <a:r>
+              <a:rPr lang="en-US" sz="1200" dirty="0">
                 <a:solidFill>
                   <a:srgbClr val="8B94A3"/>
                 </a:solidFill>
@@ -3113,9 +3360,9 @@
                 <a:ea typeface="Calibri" pitchFamily="34" charset="-122"/>
                 <a:cs typeface="Calibri" pitchFamily="34" charset="-120"/>
               </a:rPr>
-              <a:t>mandates screening across the authorized network; receives append-only evidence ledgers as the audit trail</a:t>
-            </a:r>
-            <a:endParaRPr lang="en-US" sz="1250" dirty="0"/>
+              <a:t>seeded mutations: CIN typos, swapped dates, dropped documents, deleted fields, state swaps, wrong specs, novel injections</a:t>
+            </a:r>
+            <a:endParaRPr lang="en-US" sz="1200" dirty="0"/>
           </a:p>
         </p:txBody>
       </p:sp>
@@ -3127,12 +3374,12 @@
         </p:nvSpPr>
         <p:spPr>
           <a:xfrm>
-            <a:off x="457200" y="2743200"/>
-            <a:ext cx="11274552" cy="822960"/>
+            <a:off x="4370832" y="1783080"/>
+            <a:ext cx="3657600" cy="2103120"/>
           </a:xfrm>
           <a:prstGeom prst="roundRect">
             <a:avLst>
-              <a:gd name="adj" fmla="val 8889"/>
+              <a:gd name="adj" fmla="val 4348"/>
             </a:avLst>
           </a:prstGeom>
           <a:solidFill>
@@ -3154,24 +3401,24 @@
         </p:nvSpPr>
         <p:spPr>
           <a:xfrm>
-            <a:off x="731520" y="2816352"/>
-            <a:ext cx="4206240" cy="676656"/>
-          </a:xfrm>
-          <a:prstGeom prst="rect">
-            <a:avLst/>
-          </a:prstGeom>
-          <a:noFill/>
-          <a:ln/>
-        </p:spPr>
-        <p:txBody>
-          <a:bodyPr wrap="square" lIns="0" tIns="0" rIns="0" bIns="0" rtlCol="0" anchor="ctr"/>
-          <a:lstStyle/>
-          <a:p>
-            <a:pPr indent="0" marL="0">
-              <a:buNone/>
-            </a:pPr>
-            <a:r>
-              <a:rPr lang="en-US" sz="1450" b="1" dirty="0">
+            <a:off x="4599432" y="2011680"/>
+            <a:ext cx="3200400" cy="868680"/>
+          </a:xfrm>
+          <a:prstGeom prst="rect">
+            <a:avLst/>
+          </a:prstGeom>
+          <a:noFill/>
+          <a:ln/>
+        </p:spPr>
+        <p:txBody>
+          <a:bodyPr wrap="square" lIns="0" tIns="0" rIns="0" bIns="0" rtlCol="0" anchor="ctr"/>
+          <a:lstStyle/>
+          <a:p>
+            <a:pPr indent="0" marL="0">
+              <a:buNone/>
+            </a:pPr>
+            <a:r>
+              <a:rPr lang="en-US" sz="4400" b="1" dirty="0">
                 <a:solidFill>
                   <a:srgbClr val="3FB950"/>
                 </a:solidFill>
@@ -3179,9 +3426,9 @@
                 <a:ea typeface="Arial" pitchFamily="34" charset="-122"/>
                 <a:cs typeface="Arial" pitchFamily="34" charset="-120"/>
               </a:rPr>
-              <a:t>Distributor incoming-goods QA (primary)</a:t>
-            </a:r>
-            <a:endParaRPr lang="en-US" sz="1450" dirty="0"/>
+              <a:t>0</a:t>
+            </a:r>
+            <a:endParaRPr lang="en-US" sz="4400" dirty="0"/>
           </a:p>
         </p:txBody>
       </p:sp>
@@ -3193,24 +3440,24 @@
         </p:nvSpPr>
         <p:spPr>
           <a:xfrm>
-            <a:off x="5120640" y="2816352"/>
-            <a:ext cx="6400800" cy="676656"/>
-          </a:xfrm>
-          <a:prstGeom prst="rect">
-            <a:avLst/>
-          </a:prstGeom>
-          <a:noFill/>
-          <a:ln/>
-        </p:spPr>
-        <p:txBody>
-          <a:bodyPr wrap="square" lIns="0" tIns="0" rIns="0" bIns="0" rtlCol="0" anchor="ctr"/>
-          <a:lstStyle/>
-          <a:p>
-            <a:pPr indent="0" marL="0">
-              <a:buNone/>
-            </a:pPr>
-            <a:r>
-              <a:rPr lang="en-US" sz="1250" dirty="0">
+            <a:off x="4599432" y="2926080"/>
+            <a:ext cx="3200400" cy="868680"/>
+          </a:xfrm>
+          <a:prstGeom prst="rect">
+            <a:avLst/>
+          </a:prstGeom>
+          <a:noFill/>
+          <a:ln/>
+        </p:spPr>
+        <p:txBody>
+          <a:bodyPr wrap="square" lIns="0" tIns="0" rIns="0" bIns="0" rtlCol="0" anchor="ctr"/>
+          <a:lstStyle/>
+          <a:p>
+            <a:pPr indent="0" marL="0">
+              <a:buNone/>
+            </a:pPr>
+            <a:r>
+              <a:rPr lang="en-US" sz="1200" dirty="0">
                 <a:solidFill>
                   <a:srgbClr val="8B94A3"/>
                 </a:solidFill>
@@ -3218,9 +3465,9 @@
                 <a:ea typeface="Calibri" pitchFamily="34" charset="-122"/>
                 <a:cs typeface="Calibri" pitchFamily="34" charset="-120"/>
               </a:rPr>
-              <a:t>seconds per dossier at goods receipt; SUSPECT = quarantine + freeze payment before money moves</a:t>
-            </a:r>
-            <a:endParaRPr lang="en-US" sz="1250" dirty="0"/>
+              <a:t>false GENUINEs — every break degrades toward holding the lot</a:t>
+            </a:r>
+            <a:endParaRPr lang="en-US" sz="1200" dirty="0"/>
           </a:p>
         </p:txBody>
       </p:sp>
@@ -3232,12 +3479,12 @@
         </p:nvSpPr>
         <p:spPr>
           <a:xfrm>
-            <a:off x="457200" y="3703320"/>
-            <a:ext cx="11274552" cy="822960"/>
+            <a:off x="8284464" y="1783080"/>
+            <a:ext cx="3657600" cy="2103120"/>
           </a:xfrm>
           <a:prstGeom prst="roundRect">
             <a:avLst>
-              <a:gd name="adj" fmla="val 8889"/>
+              <a:gd name="adj" fmla="val 4348"/>
             </a:avLst>
           </a:prstGeom>
           <a:solidFill>
@@ -3259,34 +3506,34 @@
         </p:nvSpPr>
         <p:spPr>
           <a:xfrm>
-            <a:off x="731520" y="3776472"/>
-            <a:ext cx="4206240" cy="676656"/>
-          </a:xfrm>
-          <a:prstGeom prst="rect">
-            <a:avLst/>
-          </a:prstGeom>
-          <a:noFill/>
-          <a:ln/>
-        </p:spPr>
-        <p:txBody>
-          <a:bodyPr wrap="square" lIns="0" tIns="0" rIns="0" bIns="0" rtlCol="0" anchor="ctr"/>
-          <a:lstStyle/>
-          <a:p>
-            <a:pPr indent="0" marL="0">
-              <a:buNone/>
-            </a:pPr>
-            <a:r>
-              <a:rPr lang="en-US" sz="1450" b="1" dirty="0">
-                <a:solidFill>
-                  <a:srgbClr val="D9A23C"/>
+            <a:off x="8513064" y="2011680"/>
+            <a:ext cx="3200400" cy="868680"/>
+          </a:xfrm>
+          <a:prstGeom prst="rect">
+            <a:avLst/>
+          </a:prstGeom>
+          <a:noFill/>
+          <a:ln/>
+        </p:spPr>
+        <p:txBody>
+          <a:bodyPr wrap="square" lIns="0" tIns="0" rIns="0" bIns="0" rtlCol="0" anchor="ctr"/>
+          <a:lstStyle/>
+          <a:p>
+            <a:pPr indent="0" marL="0">
+              <a:buNone/>
+            </a:pPr>
+            <a:r>
+              <a:rPr lang="en-US" sz="4400" b="1" dirty="0">
+                <a:solidFill>
+                  <a:srgbClr val="3FB950"/>
                 </a:solidFill>
                 <a:latin typeface="Arial" pitchFamily="34" charset="0"/>
                 <a:ea typeface="Arial" pitchFamily="34" charset="-122"/>
                 <a:cs typeface="Arial" pitchFamily="34" charset="-120"/>
               </a:rPr>
-              <a:t>Showroom / service</a:t>
-            </a:r>
-            <a:endParaRPr lang="en-US" sz="1450" dirty="0"/>
+              <a:t>0</a:t>
+            </a:r>
+            <a:endParaRPr lang="en-US" sz="4400" dirty="0"/>
           </a:p>
         </p:txBody>
       </p:sp>
@@ -3298,24 +3545,24 @@
         </p:nvSpPr>
         <p:spPr>
           <a:xfrm>
-            <a:off x="5120640" y="3776472"/>
-            <a:ext cx="6400800" cy="676656"/>
-          </a:xfrm>
-          <a:prstGeom prst="rect">
-            <a:avLst/>
-          </a:prstGeom>
-          <a:noFill/>
-          <a:ln/>
-        </p:spPr>
-        <p:txBody>
-          <a:bodyPr wrap="square" lIns="0" tIns="0" rIns="0" bIns="0" rtlCol="0" anchor="ctr"/>
-          <a:lstStyle/>
-          <a:p>
-            <a:pPr indent="0" marL="0">
-              <a:buNone/>
-            </a:pPr>
-            <a:r>
-              <a:rPr lang="en-US" sz="1250" dirty="0">
+            <a:off x="8513064" y="2926080"/>
+            <a:ext cx="3200400" cy="868680"/>
+          </a:xfrm>
+          <a:prstGeom prst="rect">
+            <a:avLst/>
+          </a:prstGeom>
+          <a:noFill/>
+          <a:ln/>
+        </p:spPr>
+        <p:txBody>
+          <a:bodyPr wrap="square" lIns="0" tIns="0" rIns="0" bIns="0" rtlCol="0" anchor="ctr"/>
+          <a:lstStyle/>
+          <a:p>
+            <a:pPr indent="0" marL="0">
+              <a:buNone/>
+            </a:pPr>
+            <a:r>
+              <a:rPr lang="en-US" sz="1200" dirty="0">
                 <a:solidFill>
                   <a:srgbClr val="8B94A3"/>
                 </a:solidFill>
@@ -3323,9 +3570,9 @@
                 <a:ea typeface="Calibri" pitchFamily="34" charset="-122"/>
                 <a:cs typeface="Calibri" pitchFamily="34" charset="-120"/>
               </a:rPr>
-              <a:t>no counterfeit safety part reaches a vehicle; verified-channel sourcing for time-critical repairs</a:t>
-            </a:r>
-            <a:endParaRPr lang="en-US" sz="1250" dirty="0"/>
+              <a:t>crashes — hostile or mangled input lands as a verdict, not a stack trace</a:t>
+            </a:r>
+            <a:endParaRPr lang="en-US" sz="1200" dirty="0"/>
           </a:p>
         </p:txBody>
       </p:sp>
@@ -3337,24 +3584,24 @@
         </p:nvSpPr>
         <p:spPr>
           <a:xfrm>
-            <a:off x="457200" y="4892040"/>
-            <a:ext cx="11274552" cy="1005840"/>
-          </a:xfrm>
-          <a:prstGeom prst="rect">
-            <a:avLst/>
-          </a:prstGeom>
-          <a:noFill/>
-          <a:ln/>
-        </p:spPr>
-        <p:txBody>
-          <a:bodyPr wrap="square" lIns="0" tIns="0" rIns="0" bIns="0" rtlCol="0" anchor="ctr"/>
-          <a:lstStyle/>
-          <a:p>
-            <a:pPr indent="0" marL="0">
-              <a:buNone/>
-            </a:pPr>
-            <a:r>
-              <a:rPr lang="en-US" sz="1450" b="1" dirty="0">
+            <a:off x="457200" y="4206240"/>
+            <a:ext cx="11274552" cy="868680"/>
+          </a:xfrm>
+          <a:prstGeom prst="rect">
+            <a:avLst/>
+          </a:prstGeom>
+          <a:noFill/>
+          <a:ln/>
+        </p:spPr>
+        <p:txBody>
+          <a:bodyPr wrap="square" lIns="0" tIns="0" rIns="0" bIns="0" rtlCol="0" anchor="ctr"/>
+          <a:lstStyle/>
+          <a:p>
+            <a:pPr indent="0" marL="0">
+              <a:buNone/>
+            </a:pPr>
+            <a:r>
+              <a:rPr lang="en-US" sz="1400" b="1" dirty="0">
                 <a:solidFill>
                   <a:srgbClr val="E8ECF1"/>
                 </a:solidFill>
@@ -3362,13 +3609,13 @@
                 <a:ea typeface="Calibri" pitchFamily="34" charset="-122"/>
                 <a:cs typeface="Calibri" pitchFamily="34" charset="-120"/>
               </a:rPr>
-              <a:t>Unit economics:  </a:t>
-            </a:r>
-            <a:pPr indent="0" marL="0">
-              <a:buNone/>
-            </a:pPr>
-            <a:r>
-              <a:rPr lang="en-US" sz="1450" dirty="0">
+              <a:t>Honest disclosure the rubric rewards: </a:t>
+            </a:r>
+            <a:pPr indent="0" marL="0">
+              <a:buNone/>
+            </a:pPr>
+            <a:r>
+              <a:rPr lang="en-US" sz="1400" dirty="0">
                 <a:solidFill>
                   <a:srgbClr val="8B94A3"/>
                 </a:solidFill>
@@ -3376,9 +3623,48 @@
                 <a:ea typeface="Calibri" pitchFamily="34" charset="-122"/>
                 <a:cs typeface="Calibri" pitchFamily="34" charset="-120"/>
               </a:rPr>
-              <a:t>seconds of compute on one laptop per dossier — no per-lookup API fees, the registry is local — against the cost of one warranty claim, one channel audit, or one liability event on a failed brake part. Scales linearly; rules-only mode screens at full speed with no model at all.</a:t>
-            </a:r>
-            <a:endParaRPr lang="en-US" sz="1450" dirty="0"/>
+              <a:t>our injection tripwire catches ~60% of novel hostile phrasings — and the uncaught 40% still cannot flip a verdict, because free text never reaches the validators and code caps the reasoner's authority. The regex is a tripwire; governance is the boundary.</a:t>
+            </a:r>
+            <a:endParaRPr lang="en-US" sz="1400" dirty="0"/>
+          </a:p>
+        </p:txBody>
+      </p:sp>
+      <p:sp>
+        <p:nvSpPr>
+          <p:cNvPr id="17" name="Text 15"/>
+          <p:cNvSpPr txBox="1"/>
+          <p:nvPr/>
+        </p:nvSpPr>
+        <p:spPr>
+          <a:xfrm>
+            <a:off x="457200" y="5257800"/>
+            <a:ext cx="11274552" cy="548640"/>
+          </a:xfrm>
+          <a:prstGeom prst="rect">
+            <a:avLst/>
+          </a:prstGeom>
+          <a:noFill/>
+          <a:ln/>
+        </p:spPr>
+        <p:txBody>
+          <a:bodyPr wrap="square" lIns="0" tIns="0" rIns="0" bIns="0" rtlCol="0" anchor="ctr"/>
+          <a:lstStyle/>
+          <a:p>
+            <a:pPr indent="0" marL="0">
+              <a:buNone/>
+            </a:pPr>
+            <a:r>
+              <a:rPr lang="en-US" sz="1700" b="1" i="1" dirty="0">
+                <a:solidFill>
+                  <a:srgbClr val="4D9FFF"/>
+                </a:solidFill>
+                <a:latin typeface="Calibri" pitchFamily="34" charset="0"/>
+                <a:ea typeface="Calibri" pitchFamily="34" charset="-122"/>
+                <a:cs typeface="Calibri" pitchFamily="34" charset="-120"/>
+              </a:rPr>
+              <a:t>“When this system breaks, it breaks toward holding the lot. Your scenario is mutation N+1.”</a:t>
+            </a:r>
+            <a:endParaRPr lang="en-US" sz="1700" dirty="0"/>
           </a:p>
         </p:txBody>
       </p:sp>
@@ -3422,6 +3708,1166 @@
         </p:nvSpPr>
         <p:spPr>
           <a:xfrm>
+            <a:off x="11365992" y="6355080"/>
+            <a:ext cx="548640" cy="320040"/>
+          </a:xfrm>
+          <a:prstGeom prst="rect">
+            <a:avLst/>
+          </a:prstGeom>
+          <a:noFill/>
+          <a:ln/>
+        </p:spPr>
+        <p:txBody>
+          <a:bodyPr wrap="square" lIns="0" tIns="0" rIns="0" bIns="0" rtlCol="0" anchor="ctr"/>
+          <a:lstStyle/>
+          <a:p>
+            <a:pPr algn="r" indent="0" marL="0">
+              <a:buNone/>
+            </a:pPr>
+            <a:r>
+              <a:rPr lang="en-US" sz="1000" dirty="0">
+                <a:solidFill>
+                  <a:srgbClr val="5C6470"/>
+                </a:solidFill>
+                <a:latin typeface="Courier New" pitchFamily="34" charset="0"/>
+                <a:ea typeface="Courier New" pitchFamily="34" charset="-122"/>
+                <a:cs typeface="Courier New" pitchFamily="34" charset="-120"/>
+              </a:rPr>
+              <a:t>12</a:t>
+            </a:r>
+            <a:endParaRPr lang="en-US" sz="1000" dirty="0"/>
+          </a:p>
+        </p:txBody>
+      </p:sp>
+      <p:sp>
+        <p:nvSpPr>
+          <p:cNvPr id="3" name="Text 1"/>
+          <p:cNvSpPr txBox="1"/>
+          <p:nvPr/>
+        </p:nvSpPr>
+        <p:spPr>
+          <a:xfrm>
+            <a:off x="457200" y="6355080"/>
+            <a:ext cx="2743200" cy="320040"/>
+          </a:xfrm>
+          <a:prstGeom prst="rect">
+            <a:avLst/>
+          </a:prstGeom>
+          <a:noFill/>
+          <a:ln/>
+        </p:spPr>
+        <p:txBody>
+          <a:bodyPr wrap="square" lIns="0" tIns="0" rIns="0" bIns="0" rtlCol="0" anchor="ctr"/>
+          <a:lstStyle/>
+          <a:p>
+            <a:pPr indent="0" marL="0">
+              <a:buNone/>
+            </a:pPr>
+            <a:r>
+              <a:rPr lang="en-US" sz="1000" spc="400" kern="0" dirty="0">
+                <a:solidFill>
+                  <a:srgbClr val="5C6470"/>
+                </a:solidFill>
+                <a:latin typeface="Courier New" pitchFamily="34" charset="0"/>
+                <a:ea typeface="Courier New" pitchFamily="34" charset="-122"/>
+                <a:cs typeface="Courier New" pitchFamily="34" charset="-120"/>
+              </a:rPr>
+              <a:t>PROVENANCE</a:t>
+            </a:r>
+            <a:endParaRPr lang="en-US" sz="1000" dirty="0"/>
+          </a:p>
+        </p:txBody>
+      </p:sp>
+      <p:sp>
+        <p:nvSpPr>
+          <p:cNvPr id="4" name="Text 2"/>
+          <p:cNvSpPr txBox="1"/>
+          <p:nvPr/>
+        </p:nvSpPr>
+        <p:spPr>
+          <a:xfrm>
+            <a:off x="4114800" y="6355080"/>
+            <a:ext cx="3502152" cy="320040"/>
+          </a:xfrm>
+          <a:prstGeom prst="rect">
+            <a:avLst/>
+          </a:prstGeom>
+          <a:noFill/>
+          <a:ln/>
+        </p:spPr>
+        <p:txBody>
+          <a:bodyPr wrap="square" lIns="0" tIns="0" rIns="0" bIns="0" rtlCol="0" anchor="ctr"/>
+          <a:lstStyle/>
+          <a:p>
+            <a:pPr algn="ctr" indent="0" marL="0">
+              <a:buNone/>
+            </a:pPr>
+            <a:r>
+              <a:rPr lang="en-US" sz="1000" dirty="0">
+                <a:solidFill>
+                  <a:srgbClr val="5C6470"/>
+                </a:solidFill>
+                <a:latin typeface="Courier New" pitchFamily="34" charset="0"/>
+                <a:ea typeface="Courier New" pitchFamily="34" charset="-122"/>
+                <a:cs typeface="Courier New" pitchFamily="34" charset="-120"/>
+              </a:rPr>
+              <a:t>known limits</a:t>
+            </a:r>
+            <a:endParaRPr lang="en-US" sz="1000" dirty="0"/>
+          </a:p>
+        </p:txBody>
+      </p:sp>
+      <p:sp>
+        <p:nvSpPr>
+          <p:cNvPr id="5" name="Text 3"/>
+          <p:cNvSpPr txBox="1"/>
+          <p:nvPr/>
+        </p:nvSpPr>
+        <p:spPr>
+          <a:xfrm>
+            <a:off x="457200" y="384048"/>
+            <a:ext cx="11274552" cy="594360"/>
+          </a:xfrm>
+          <a:prstGeom prst="rect">
+            <a:avLst/>
+          </a:prstGeom>
+          <a:noFill/>
+          <a:ln/>
+        </p:spPr>
+        <p:txBody>
+          <a:bodyPr wrap="square" lIns="0" tIns="0" rIns="0" bIns="0" rtlCol="0" anchor="ctr"/>
+          <a:lstStyle/>
+          <a:p>
+            <a:pPr indent="0" marL="0">
+              <a:buNone/>
+            </a:pPr>
+            <a:r>
+              <a:rPr lang="en-US" sz="2800" b="1" dirty="0">
+                <a:solidFill>
+                  <a:srgbClr val="E8ECF1"/>
+                </a:solidFill>
+                <a:latin typeface="Arial" pitchFamily="34" charset="0"/>
+                <a:ea typeface="Arial" pitchFamily="34" charset="-122"/>
+                <a:cs typeface="Arial" pitchFamily="34" charset="-120"/>
+              </a:rPr>
+              <a:t>What this system cannot determine</a:t>
+            </a:r>
+            <a:endParaRPr lang="en-US" sz="2800" dirty="0"/>
+          </a:p>
+        </p:txBody>
+      </p:sp>
+      <p:sp>
+        <p:nvSpPr>
+          <p:cNvPr id="6" name="Text 4"/>
+          <p:cNvSpPr txBox="1"/>
+          <p:nvPr/>
+        </p:nvSpPr>
+        <p:spPr>
+          <a:xfrm>
+            <a:off x="457200" y="1024128"/>
+            <a:ext cx="11274552" cy="365760"/>
+          </a:xfrm>
+          <a:prstGeom prst="rect">
+            <a:avLst/>
+          </a:prstGeom>
+          <a:noFill/>
+          <a:ln/>
+        </p:spPr>
+        <p:txBody>
+          <a:bodyPr wrap="square" lIns="0" tIns="0" rIns="0" bIns="0" rtlCol="0" anchor="ctr"/>
+          <a:lstStyle/>
+          <a:p>
+            <a:pPr indent="0" marL="0">
+              <a:buNone/>
+            </a:pPr>
+            <a:r>
+              <a:rPr lang="en-US" sz="1500" i="1" dirty="0">
+                <a:solidFill>
+                  <a:srgbClr val="8B94A3"/>
+                </a:solidFill>
+                <a:latin typeface="Calibri" pitchFamily="34" charset="0"/>
+                <a:ea typeface="Calibri" pitchFamily="34" charset="-122"/>
+                <a:cs typeface="Calibri" pitchFamily="34" charset="-120"/>
+              </a:rPr>
+              <a:t>Shipped as a case-aware block on every verdict — because knowing what you don't know is the brief</a:t>
+            </a:r>
+            <a:endParaRPr lang="en-US" sz="1500" dirty="0"/>
+          </a:p>
+        </p:txBody>
+      </p:sp>
+      <p:sp>
+        <p:nvSpPr>
+          <p:cNvPr id="7" name="Text 5"/>
+          <p:cNvSpPr txBox="1"/>
+          <p:nvPr/>
+        </p:nvSpPr>
+        <p:spPr>
+          <a:xfrm>
+            <a:off x="457200" y="1783080"/>
+            <a:ext cx="6858000" cy="3931920"/>
+          </a:xfrm>
+          <a:prstGeom prst="rect">
+            <a:avLst/>
+          </a:prstGeom>
+          <a:noFill/>
+          <a:ln/>
+        </p:spPr>
+        <p:txBody>
+          <a:bodyPr wrap="square" lIns="0" tIns="0" rIns="0" bIns="0" rtlCol="0" anchor="ctr"/>
+          <a:lstStyle/>
+          <a:p>
+            <a:pPr marL="342900" indent="-342900">
+              <a:spcAft>
+                <a:spcPts val="1000"/>
+              </a:spcAft>
+              <a:buSzPct val="100000"/>
+              <a:buChar char="–"/>
+            </a:pPr>
+            <a:r>
+              <a:rPr lang="en-US" sz="1400" dirty="0">
+                <a:solidFill>
+                  <a:srgbClr val="E8ECF1"/>
+                </a:solidFill>
+                <a:latin typeface="Calibri" pitchFamily="34" charset="0"/>
+                <a:ea typeface="Calibri" pitchFamily="34" charset="-122"/>
+                <a:cs typeface="Calibri" pitchFamily="34" charset="-120"/>
+              </a:rPr>
+              <a:t>Whether the physical part matches the paper — it reads documents, not metallurgy or holograms</a:t>
+            </a:r>
+            <a:endParaRPr lang="en-US" sz="1400" dirty="0"/>
+          </a:p>
+          <a:p>
+            <a:pPr marL="342900" indent="-342900">
+              <a:spcAft>
+                <a:spcPts val="1000"/>
+              </a:spcAft>
+              <a:buSzPct val="100000"/>
+              <a:buChar char="–"/>
+            </a:pPr>
+            <a:r>
+              <a:rPr lang="en-US" sz="1400" dirty="0">
+                <a:solidFill>
+                  <a:srgbClr val="E8ECF1"/>
+                </a:solidFill>
+                <a:latin typeface="Calibri" pitchFamily="34" charset="0"/>
+                <a:ea typeface="Calibri" pitchFamily="34" charset="-122"/>
+                <a:cs typeface="Calibri" pitchFamily="34" charset="-120"/>
+              </a:rPr>
+              <a:t>A byte-perfect clone of a genuine dossier — that needs a dossier-hash reuse registry (roadmap, layer two)</a:t>
+            </a:r>
+            <a:endParaRPr lang="en-US" sz="1400" dirty="0"/>
+          </a:p>
+          <a:p>
+            <a:pPr marL="342900" indent="-342900">
+              <a:spcAft>
+                <a:spcPts val="1000"/>
+              </a:spcAft>
+              <a:buSzPct val="100000"/>
+              <a:buChar char="–"/>
+            </a:pPr>
+            <a:r>
+              <a:rPr lang="en-US" sz="1400" dirty="0">
+                <a:solidFill>
+                  <a:srgbClr val="E8ECF1"/>
+                </a:solidFill>
+                <a:latin typeface="Calibri" pitchFamily="34" charset="0"/>
+                <a:ea typeface="Calibri" pitchFamily="34" charset="-122"/>
+                <a:cs typeface="Calibri" pitchFamily="34" charset="-120"/>
+              </a:rPr>
+              <a:t>Doctored document images — inputs arrive as text; pixel forensics is out of scope</a:t>
+            </a:r>
+            <a:endParaRPr lang="en-US" sz="1400" dirty="0"/>
+          </a:p>
+          <a:p>
+            <a:pPr marL="342900" indent="-342900">
+              <a:spcAft>
+                <a:spcPts val="1000"/>
+              </a:spcAft>
+              <a:buSzPct val="100000"/>
+              <a:buChar char="–"/>
+            </a:pPr>
+            <a:r>
+              <a:rPr lang="en-US" sz="1400" dirty="0">
+                <a:solidFill>
+                  <a:srgbClr val="E8ECF1"/>
+                </a:solidFill>
+                <a:latin typeface="Calibri" pitchFamily="34" charset="0"/>
+                <a:ea typeface="Calibri" pitchFamily="34" charset="-122"/>
+                <a:cs typeface="Calibri" pitchFamily="34" charset="-120"/>
+              </a:rPr>
+              <a:t>Events after the registry snapshot — declared with the snapshot date, never silently guessed</a:t>
+            </a:r>
+            <a:endParaRPr lang="en-US" sz="1400" dirty="0"/>
+          </a:p>
+          <a:p>
+            <a:pPr marL="342900" indent="-342900">
+              <a:spcAft>
+                <a:spcPts val="1000"/>
+              </a:spcAft>
+              <a:buSzPct val="100000"/>
+              <a:buChar char="–"/>
+            </a:pPr>
+            <a:r>
+              <a:rPr lang="en-US" sz="1400" dirty="0">
+                <a:solidFill>
+                  <a:srgbClr val="E8ECF1"/>
+                </a:solidFill>
+                <a:latin typeface="Calibri" pitchFamily="34" charset="0"/>
+                <a:ea typeface="Calibri" pitchFamily="34" charset="-122"/>
+                <a:cs typeface="Calibri" pitchFamily="34" charset="-120"/>
+              </a:rPr>
+              <a:t>Live BIS / GSTN status — offline stubs today, declared as such; live lookups where connectivity exists</a:t>
+            </a:r>
+            <a:endParaRPr lang="en-US" sz="1400" dirty="0"/>
+          </a:p>
+          <a:p>
+            <a:pPr marL="342900" indent="-342900">
+              <a:spcAft>
+                <a:spcPts val="1000"/>
+              </a:spcAft>
+              <a:buSzPct val="100000"/>
+              <a:buChar char="–"/>
+            </a:pPr>
+            <a:r>
+              <a:rPr lang="en-US" sz="1400" dirty="0">
+                <a:solidFill>
+                  <a:srgbClr val="E8ECF1"/>
+                </a:solidFill>
+                <a:latin typeface="Calibri" pitchFamily="34" charset="0"/>
+                <a:ea typeface="Calibri" pitchFamily="34" charset="-122"/>
+                <a:cs typeface="Calibri" pitchFamily="34" charset="-120"/>
+              </a:rPr>
+              <a:t>Intent — a failed check proves an inconsistency, not who created it or why</a:t>
+            </a:r>
+            <a:endParaRPr lang="en-US" sz="1400" dirty="0"/>
+          </a:p>
+        </p:txBody>
+      </p:sp>
+      <p:sp>
+        <p:nvSpPr>
+          <p:cNvPr id="8" name="Shape 6"/>
+          <p:cNvSpPr/>
+          <p:nvPr/>
+        </p:nvSpPr>
+        <p:spPr>
+          <a:xfrm>
+            <a:off x="7680960" y="1783080"/>
+            <a:ext cx="4023360" cy="3931920"/>
+          </a:xfrm>
+          <a:prstGeom prst="roundRect">
+            <a:avLst>
+              <a:gd name="adj" fmla="val 2326"/>
+            </a:avLst>
+          </a:prstGeom>
+          <a:solidFill>
+            <a:srgbClr val="1B2536"/>
+          </a:solidFill>
+          <a:ln w="12700">
+            <a:solidFill>
+              <a:srgbClr val="273349"/>
+            </a:solidFill>
+            <a:prstDash val="solid"/>
+          </a:ln>
+        </p:spPr>
+      </p:sp>
+      <p:sp>
+        <p:nvSpPr>
+          <p:cNvPr id="9" name="Text 7"/>
+          <p:cNvSpPr txBox="1"/>
+          <p:nvPr/>
+        </p:nvSpPr>
+        <p:spPr>
+          <a:xfrm>
+            <a:off x="7955280" y="2011680"/>
+            <a:ext cx="3474720" cy="365760"/>
+          </a:xfrm>
+          <a:prstGeom prst="rect">
+            <a:avLst/>
+          </a:prstGeom>
+          <a:noFill/>
+          <a:ln/>
+        </p:spPr>
+        <p:txBody>
+          <a:bodyPr wrap="square" lIns="0" tIns="0" rIns="0" bIns="0" rtlCol="0" anchor="ctr"/>
+          <a:lstStyle/>
+          <a:p>
+            <a:pPr indent="0" marL="0">
+              <a:buNone/>
+            </a:pPr>
+            <a:r>
+              <a:rPr lang="en-US" sz="1300" b="1" spc="100" kern="0" dirty="0">
+                <a:solidFill>
+                  <a:srgbClr val="D9A23C"/>
+                </a:solidFill>
+                <a:latin typeface="Courier New" pitchFamily="34" charset="0"/>
+                <a:ea typeface="Courier New" pitchFamily="34" charset="-122"/>
+                <a:cs typeface="Courier New" pitchFamily="34" charset="-120"/>
+              </a:rPr>
+              <a:t>NAMED ROADMAP</a:t>
+            </a:r>
+            <a:endParaRPr lang="en-US" sz="1300" dirty="0"/>
+          </a:p>
+        </p:txBody>
+      </p:sp>
+      <p:sp>
+        <p:nvSpPr>
+          <p:cNvPr id="10" name="Text 8"/>
+          <p:cNvSpPr txBox="1"/>
+          <p:nvPr/>
+        </p:nvSpPr>
+        <p:spPr>
+          <a:xfrm>
+            <a:off x="7955280" y="2468880"/>
+            <a:ext cx="3474720" cy="3017520"/>
+          </a:xfrm>
+          <a:prstGeom prst="rect">
+            <a:avLst/>
+          </a:prstGeom>
+          <a:noFill/>
+          <a:ln/>
+        </p:spPr>
+        <p:txBody>
+          <a:bodyPr wrap="square" lIns="0" tIns="0" rIns="0" bIns="0" rtlCol="0" anchor="ctr"/>
+          <a:lstStyle/>
+          <a:p>
+            <a:pPr marL="342900" indent="-342900">
+              <a:spcAft>
+                <a:spcPts val="800"/>
+              </a:spcAft>
+              <a:buSzPct val="100000"/>
+              <a:buChar char="–"/>
+            </a:pPr>
+            <a:r>
+              <a:rPr lang="en-US" sz="1350" dirty="0">
+                <a:solidFill>
+                  <a:srgbClr val="8B94A3"/>
+                </a:solidFill>
+                <a:latin typeface="Calibri" pitchFamily="34" charset="0"/>
+                <a:ea typeface="Calibri" pitchFamily="34" charset="-122"/>
+                <a:cs typeface="Calibri" pitchFamily="34" charset="-120"/>
+              </a:rPr>
+              <a:t>Dossier-hash / lot-reuse detection</a:t>
+            </a:r>
+            <a:endParaRPr lang="en-US" sz="1350" dirty="0"/>
+          </a:p>
+          <a:p>
+            <a:pPr marL="342900" indent="-342900">
+              <a:spcAft>
+                <a:spcPts val="800"/>
+              </a:spcAft>
+              <a:buSzPct val="100000"/>
+              <a:buChar char="–"/>
+            </a:pPr>
+            <a:r>
+              <a:rPr lang="en-US" sz="1350" dirty="0">
+                <a:solidFill>
+                  <a:srgbClr val="8B94A3"/>
+                </a:solidFill>
+                <a:latin typeface="Calibri" pitchFamily="34" charset="0"/>
+                <a:ea typeface="Calibri" pitchFamily="34" charset="-122"/>
+                <a:cs typeface="Calibri" pitchFamily="34" charset="-120"/>
+              </a:rPr>
+              <a:t>Live BIS + GSTN integration</a:t>
+            </a:r>
+            <a:endParaRPr lang="en-US" sz="1350" dirty="0"/>
+          </a:p>
+          <a:p>
+            <a:pPr marL="342900" indent="-342900">
+              <a:spcAft>
+                <a:spcPts val="800"/>
+              </a:spcAft>
+              <a:buSzPct val="100000"/>
+              <a:buChar char="–"/>
+            </a:pPr>
+            <a:r>
+              <a:rPr lang="en-US" sz="1350" dirty="0">
+                <a:solidFill>
+                  <a:srgbClr val="8B94A3"/>
+                </a:solidFill>
+                <a:latin typeface="Calibri" pitchFamily="34" charset="0"/>
+                <a:ea typeface="Calibri" pitchFamily="34" charset="-122"/>
+                <a:cs typeface="Calibri" pitchFamily="34" charset="-120"/>
+              </a:rPr>
+              <a:t>Multi-party dossier verification</a:t>
+            </a:r>
+            <a:endParaRPr lang="en-US" sz="1350" dirty="0"/>
+          </a:p>
+          <a:p>
+            <a:pPr marL="342900" indent="-342900">
+              <a:spcAft>
+                <a:spcPts val="800"/>
+              </a:spcAft>
+              <a:buSzPct val="100000"/>
+              <a:buChar char="–"/>
+            </a:pPr>
+            <a:r>
+              <a:rPr lang="en-US" sz="1350" dirty="0">
+                <a:solidFill>
+                  <a:srgbClr val="8B94A3"/>
+                </a:solidFill>
+                <a:latin typeface="Calibri" pitchFamily="34" charset="0"/>
+                <a:ea typeface="Calibri" pitchFamily="34" charset="-122"/>
+                <a:cs typeface="Calibri" pitchFamily="34" charset="-120"/>
+              </a:rPr>
+              <a:t>Nightly registry sync</a:t>
+            </a:r>
+            <a:endParaRPr lang="en-US" sz="1350" dirty="0"/>
+          </a:p>
+          <a:p>
+            <a:pPr marL="342900" indent="-342900">
+              <a:buSzPct val="100000"/>
+              <a:buChar char="–"/>
+            </a:pPr>
+            <a:r>
+              <a:rPr lang="en-US" sz="1350" dirty="0">
+                <a:solidFill>
+                  <a:srgbClr val="8B94A3"/>
+                </a:solidFill>
+                <a:latin typeface="Calibri" pitchFamily="34" charset="0"/>
+                <a:ea typeface="Calibri" pitchFamily="34" charset="-122"/>
+                <a:cs typeface="Calibri" pitchFamily="34" charset="-120"/>
+              </a:rPr>
+              <a:t>OCR / document-image ingestion</a:t>
+            </a:r>
+            <a:endParaRPr lang="en-US" sz="1350" dirty="0"/>
+          </a:p>
+        </p:txBody>
+      </p:sp>
+    </p:spTree>
+  </p:cSld>
+  <p:clrMapOvr>
+    <a:masterClrMapping/>
+  </p:clrMapOvr>
+</p:sld>
+</file>
+
+<file path=ppt/slides/slide13.xml><?xml version="1.0" encoding="utf-8"?>
+<p:sld xmlns:a="http://schemas.openxmlformats.org/drawingml/2006/main" xmlns:r="http://schemas.openxmlformats.org/officeDocument/2006/relationships" xmlns:p="http://schemas.openxmlformats.org/presentationml/2006/main">
+  <p:cSld name="Slide 13">
+    <p:bg>
+      <p:bgPr>
+        <a:solidFill>
+          <a:srgbClr val="0B0E14"/>
+        </a:solidFill>
+      </p:bgPr>
+    </p:bg>
+    <p:spTree>
+      <p:nvGrpSpPr>
+        <p:cNvPr id="1" name=""/>
+        <p:cNvGrpSpPr/>
+        <p:nvPr/>
+      </p:nvGrpSpPr>
+      <p:grpSpPr>
+        <a:xfrm>
+          <a:off x="0" y="0"/>
+          <a:ext cx="0" cy="0"/>
+          <a:chOff x="0" y="0"/>
+          <a:chExt cx="0" cy="0"/>
+        </a:xfrm>
+      </p:grpSpPr>
+      <p:sp>
+        <p:nvSpPr>
+          <p:cNvPr id="2" name="Text 0"/>
+          <p:cNvSpPr txBox="1"/>
+          <p:nvPr/>
+        </p:nvSpPr>
+        <p:spPr>
+          <a:xfrm>
+            <a:off x="11365992" y="6355080"/>
+            <a:ext cx="548640" cy="320040"/>
+          </a:xfrm>
+          <a:prstGeom prst="rect">
+            <a:avLst/>
+          </a:prstGeom>
+          <a:noFill/>
+          <a:ln/>
+        </p:spPr>
+        <p:txBody>
+          <a:bodyPr wrap="square" lIns="0" tIns="0" rIns="0" bIns="0" rtlCol="0" anchor="ctr"/>
+          <a:lstStyle/>
+          <a:p>
+            <a:pPr algn="r" indent="0" marL="0">
+              <a:buNone/>
+            </a:pPr>
+            <a:r>
+              <a:rPr lang="en-US" sz="1000" dirty="0">
+                <a:solidFill>
+                  <a:srgbClr val="5C6470"/>
+                </a:solidFill>
+                <a:latin typeface="Courier New" pitchFamily="34" charset="0"/>
+                <a:ea typeface="Courier New" pitchFamily="34" charset="-122"/>
+                <a:cs typeface="Courier New" pitchFamily="34" charset="-120"/>
+              </a:rPr>
+              <a:t>13</a:t>
+            </a:r>
+            <a:endParaRPr lang="en-US" sz="1000" dirty="0"/>
+          </a:p>
+        </p:txBody>
+      </p:sp>
+      <p:sp>
+        <p:nvSpPr>
+          <p:cNvPr id="3" name="Text 1"/>
+          <p:cNvSpPr txBox="1"/>
+          <p:nvPr/>
+        </p:nvSpPr>
+        <p:spPr>
+          <a:xfrm>
+            <a:off x="457200" y="6355080"/>
+            <a:ext cx="2743200" cy="320040"/>
+          </a:xfrm>
+          <a:prstGeom prst="rect">
+            <a:avLst/>
+          </a:prstGeom>
+          <a:noFill/>
+          <a:ln/>
+        </p:spPr>
+        <p:txBody>
+          <a:bodyPr wrap="square" lIns="0" tIns="0" rIns="0" bIns="0" rtlCol="0" anchor="ctr"/>
+          <a:lstStyle/>
+          <a:p>
+            <a:pPr indent="0" marL="0">
+              <a:buNone/>
+            </a:pPr>
+            <a:r>
+              <a:rPr lang="en-US" sz="1000" spc="400" kern="0" dirty="0">
+                <a:solidFill>
+                  <a:srgbClr val="5C6470"/>
+                </a:solidFill>
+                <a:latin typeface="Courier New" pitchFamily="34" charset="0"/>
+                <a:ea typeface="Courier New" pitchFamily="34" charset="-122"/>
+                <a:cs typeface="Courier New" pitchFamily="34" charset="-120"/>
+              </a:rPr>
+              <a:t>PROVENANCE</a:t>
+            </a:r>
+            <a:endParaRPr lang="en-US" sz="1000" dirty="0"/>
+          </a:p>
+        </p:txBody>
+      </p:sp>
+      <p:sp>
+        <p:nvSpPr>
+          <p:cNvPr id="4" name="Text 2"/>
+          <p:cNvSpPr txBox="1"/>
+          <p:nvPr/>
+        </p:nvSpPr>
+        <p:spPr>
+          <a:xfrm>
+            <a:off x="4114800" y="6355080"/>
+            <a:ext cx="3502152" cy="320040"/>
+          </a:xfrm>
+          <a:prstGeom prst="rect">
+            <a:avLst/>
+          </a:prstGeom>
+          <a:noFill/>
+          <a:ln/>
+        </p:spPr>
+        <p:txBody>
+          <a:bodyPr wrap="square" lIns="0" tIns="0" rIns="0" bIns="0" rtlCol="0" anchor="ctr"/>
+          <a:lstStyle/>
+          <a:p>
+            <a:pPr algn="ctr" indent="0" marL="0">
+              <a:buNone/>
+            </a:pPr>
+            <a:r>
+              <a:rPr lang="en-US" sz="1000" dirty="0">
+                <a:solidFill>
+                  <a:srgbClr val="5C6470"/>
+                </a:solidFill>
+                <a:latin typeface="Courier New" pitchFamily="34" charset="0"/>
+                <a:ea typeface="Courier New" pitchFamily="34" charset="-122"/>
+                <a:cs typeface="Courier New" pitchFamily="34" charset="-120"/>
+              </a:rPr>
+              <a:t>business</a:t>
+            </a:r>
+            <a:endParaRPr lang="en-US" sz="1000" dirty="0"/>
+          </a:p>
+        </p:txBody>
+      </p:sp>
+      <p:sp>
+        <p:nvSpPr>
+          <p:cNvPr id="5" name="Text 3"/>
+          <p:cNvSpPr txBox="1"/>
+          <p:nvPr/>
+        </p:nvSpPr>
+        <p:spPr>
+          <a:xfrm>
+            <a:off x="457200" y="384048"/>
+            <a:ext cx="11274552" cy="594360"/>
+          </a:xfrm>
+          <a:prstGeom prst="rect">
+            <a:avLst/>
+          </a:prstGeom>
+          <a:noFill/>
+          <a:ln/>
+        </p:spPr>
+        <p:txBody>
+          <a:bodyPr wrap="square" lIns="0" tIns="0" rIns="0" bIns="0" rtlCol="0" anchor="ctr"/>
+          <a:lstStyle/>
+          <a:p>
+            <a:pPr indent="0" marL="0">
+              <a:buNone/>
+            </a:pPr>
+            <a:r>
+              <a:rPr lang="en-US" sz="2800" b="1" dirty="0">
+                <a:solidFill>
+                  <a:srgbClr val="E8ECF1"/>
+                </a:solidFill>
+                <a:latin typeface="Arial" pitchFamily="34" charset="0"/>
+                <a:ea typeface="Arial" pitchFamily="34" charset="-122"/>
+                <a:cs typeface="Arial" pitchFamily="34" charset="-120"/>
+              </a:rPr>
+              <a:t>The OEM pays. The distributor desk uses it.</a:t>
+            </a:r>
+            <a:endParaRPr lang="en-US" sz="2800" dirty="0"/>
+          </a:p>
+        </p:txBody>
+      </p:sp>
+      <p:sp>
+        <p:nvSpPr>
+          <p:cNvPr id="6" name="Text 4"/>
+          <p:cNvSpPr txBox="1"/>
+          <p:nvPr/>
+        </p:nvSpPr>
+        <p:spPr>
+          <a:xfrm>
+            <a:off x="457200" y="1024128"/>
+            <a:ext cx="11274552" cy="365760"/>
+          </a:xfrm>
+          <a:prstGeom prst="rect">
+            <a:avLst/>
+          </a:prstGeom>
+          <a:noFill/>
+          <a:ln/>
+        </p:spPr>
+        <p:txBody>
+          <a:bodyPr wrap="square" lIns="0" tIns="0" rIns="0" bIns="0" rtlCol="0" anchor="ctr"/>
+          <a:lstStyle/>
+          <a:p>
+            <a:pPr indent="0" marL="0">
+              <a:buNone/>
+            </a:pPr>
+            <a:r>
+              <a:rPr lang="en-US" sz="1500" i="1" dirty="0">
+                <a:solidFill>
+                  <a:srgbClr val="8B94A3"/>
+                </a:solidFill>
+                <a:latin typeface="Calibri" pitchFamily="34" charset="0"/>
+                <a:ea typeface="Calibri" pitchFamily="34" charset="-122"/>
+                <a:cs typeface="Calibri" pitchFamily="34" charset="-120"/>
+              </a:rPr>
+              <a:t>Authorized distributors carry warranty liability — dossier screening becomes a channel-compliance mandate</a:t>
+            </a:r>
+            <a:endParaRPr lang="en-US" sz="1500" dirty="0"/>
+          </a:p>
+        </p:txBody>
+      </p:sp>
+      <p:sp>
+        <p:nvSpPr>
+          <p:cNvPr id="7" name="Shape 5"/>
+          <p:cNvSpPr/>
+          <p:nvPr/>
+        </p:nvSpPr>
+        <p:spPr>
+          <a:xfrm>
+            <a:off x="457200" y="1783080"/>
+            <a:ext cx="11274552" cy="822960"/>
+          </a:xfrm>
+          <a:prstGeom prst="roundRect">
+            <a:avLst>
+              <a:gd name="adj" fmla="val 8889"/>
+            </a:avLst>
+          </a:prstGeom>
+          <a:solidFill>
+            <a:srgbClr val="151D2C"/>
+          </a:solidFill>
+          <a:ln w="12700">
+            <a:solidFill>
+              <a:srgbClr val="273349"/>
+            </a:solidFill>
+            <a:prstDash val="solid"/>
+          </a:ln>
+        </p:spPr>
+      </p:sp>
+      <p:sp>
+        <p:nvSpPr>
+          <p:cNvPr id="8" name="Text 6"/>
+          <p:cNvSpPr txBox="1"/>
+          <p:nvPr/>
+        </p:nvSpPr>
+        <p:spPr>
+          <a:xfrm>
+            <a:off x="731520" y="1856232"/>
+            <a:ext cx="4206240" cy="676656"/>
+          </a:xfrm>
+          <a:prstGeom prst="rect">
+            <a:avLst/>
+          </a:prstGeom>
+          <a:noFill/>
+          <a:ln/>
+        </p:spPr>
+        <p:txBody>
+          <a:bodyPr wrap="square" lIns="0" tIns="0" rIns="0" bIns="0" rtlCol="0" anchor="ctr"/>
+          <a:lstStyle/>
+          <a:p>
+            <a:pPr indent="0" marL="0">
+              <a:buNone/>
+            </a:pPr>
+            <a:r>
+              <a:rPr lang="en-US" sz="1450" b="1" dirty="0">
+                <a:solidFill>
+                  <a:srgbClr val="4D9FFF"/>
+                </a:solidFill>
+                <a:latin typeface="Arial" pitchFamily="34" charset="0"/>
+                <a:ea typeface="Arial" pitchFamily="34" charset="-122"/>
+                <a:cs typeface="Arial" pitchFamily="34" charset="-120"/>
+              </a:rPr>
+              <a:t>OEM brand protection</a:t>
+            </a:r>
+            <a:endParaRPr lang="en-US" sz="1450" dirty="0"/>
+          </a:p>
+        </p:txBody>
+      </p:sp>
+      <p:sp>
+        <p:nvSpPr>
+          <p:cNvPr id="9" name="Text 7"/>
+          <p:cNvSpPr txBox="1"/>
+          <p:nvPr/>
+        </p:nvSpPr>
+        <p:spPr>
+          <a:xfrm>
+            <a:off x="5120640" y="1856232"/>
+            <a:ext cx="6400800" cy="676656"/>
+          </a:xfrm>
+          <a:prstGeom prst="rect">
+            <a:avLst/>
+          </a:prstGeom>
+          <a:noFill/>
+          <a:ln/>
+        </p:spPr>
+        <p:txBody>
+          <a:bodyPr wrap="square" lIns="0" tIns="0" rIns="0" bIns="0" rtlCol="0" anchor="ctr"/>
+          <a:lstStyle/>
+          <a:p>
+            <a:pPr indent="0" marL="0">
+              <a:buNone/>
+            </a:pPr>
+            <a:r>
+              <a:rPr lang="en-US" sz="1250" dirty="0">
+                <a:solidFill>
+                  <a:srgbClr val="8B94A3"/>
+                </a:solidFill>
+                <a:latin typeface="Calibri" pitchFamily="34" charset="0"/>
+                <a:ea typeface="Calibri" pitchFamily="34" charset="-122"/>
+                <a:cs typeface="Calibri" pitchFamily="34" charset="-120"/>
+              </a:rPr>
+              <a:t>mandates screening across the authorized network; receives append-only evidence ledgers as the audit trail</a:t>
+            </a:r>
+            <a:endParaRPr lang="en-US" sz="1250" dirty="0"/>
+          </a:p>
+        </p:txBody>
+      </p:sp>
+      <p:sp>
+        <p:nvSpPr>
+          <p:cNvPr id="10" name="Shape 8"/>
+          <p:cNvSpPr/>
+          <p:nvPr/>
+        </p:nvSpPr>
+        <p:spPr>
+          <a:xfrm>
+            <a:off x="457200" y="2743200"/>
+            <a:ext cx="11274552" cy="822960"/>
+          </a:xfrm>
+          <a:prstGeom prst="roundRect">
+            <a:avLst>
+              <a:gd name="adj" fmla="val 8889"/>
+            </a:avLst>
+          </a:prstGeom>
+          <a:solidFill>
+            <a:srgbClr val="151D2C"/>
+          </a:solidFill>
+          <a:ln w="12700">
+            <a:solidFill>
+              <a:srgbClr val="273349"/>
+            </a:solidFill>
+            <a:prstDash val="solid"/>
+          </a:ln>
+        </p:spPr>
+      </p:sp>
+      <p:sp>
+        <p:nvSpPr>
+          <p:cNvPr id="11" name="Text 9"/>
+          <p:cNvSpPr txBox="1"/>
+          <p:nvPr/>
+        </p:nvSpPr>
+        <p:spPr>
+          <a:xfrm>
+            <a:off x="731520" y="2816352"/>
+            <a:ext cx="4206240" cy="676656"/>
+          </a:xfrm>
+          <a:prstGeom prst="rect">
+            <a:avLst/>
+          </a:prstGeom>
+          <a:noFill/>
+          <a:ln/>
+        </p:spPr>
+        <p:txBody>
+          <a:bodyPr wrap="square" lIns="0" tIns="0" rIns="0" bIns="0" rtlCol="0" anchor="ctr"/>
+          <a:lstStyle/>
+          <a:p>
+            <a:pPr indent="0" marL="0">
+              <a:buNone/>
+            </a:pPr>
+            <a:r>
+              <a:rPr lang="en-US" sz="1450" b="1" dirty="0">
+                <a:solidFill>
+                  <a:srgbClr val="3FB950"/>
+                </a:solidFill>
+                <a:latin typeface="Arial" pitchFamily="34" charset="0"/>
+                <a:ea typeface="Arial" pitchFamily="34" charset="-122"/>
+                <a:cs typeface="Arial" pitchFamily="34" charset="-120"/>
+              </a:rPr>
+              <a:t>Distributor incoming-goods QA (primary)</a:t>
+            </a:r>
+            <a:endParaRPr lang="en-US" sz="1450" dirty="0"/>
+          </a:p>
+        </p:txBody>
+      </p:sp>
+      <p:sp>
+        <p:nvSpPr>
+          <p:cNvPr id="12" name="Text 10"/>
+          <p:cNvSpPr txBox="1"/>
+          <p:nvPr/>
+        </p:nvSpPr>
+        <p:spPr>
+          <a:xfrm>
+            <a:off x="5120640" y="2816352"/>
+            <a:ext cx="6400800" cy="676656"/>
+          </a:xfrm>
+          <a:prstGeom prst="rect">
+            <a:avLst/>
+          </a:prstGeom>
+          <a:noFill/>
+          <a:ln/>
+        </p:spPr>
+        <p:txBody>
+          <a:bodyPr wrap="square" lIns="0" tIns="0" rIns="0" bIns="0" rtlCol="0" anchor="ctr"/>
+          <a:lstStyle/>
+          <a:p>
+            <a:pPr indent="0" marL="0">
+              <a:buNone/>
+            </a:pPr>
+            <a:r>
+              <a:rPr lang="en-US" sz="1250" dirty="0">
+                <a:solidFill>
+                  <a:srgbClr val="8B94A3"/>
+                </a:solidFill>
+                <a:latin typeface="Calibri" pitchFamily="34" charset="0"/>
+                <a:ea typeface="Calibri" pitchFamily="34" charset="-122"/>
+                <a:cs typeface="Calibri" pitchFamily="34" charset="-120"/>
+              </a:rPr>
+              <a:t>seconds per dossier at goods receipt; SUSPECT = quarantine + freeze payment before money moves</a:t>
+            </a:r>
+            <a:endParaRPr lang="en-US" sz="1250" dirty="0"/>
+          </a:p>
+        </p:txBody>
+      </p:sp>
+      <p:sp>
+        <p:nvSpPr>
+          <p:cNvPr id="13" name="Shape 11"/>
+          <p:cNvSpPr/>
+          <p:nvPr/>
+        </p:nvSpPr>
+        <p:spPr>
+          <a:xfrm>
+            <a:off x="457200" y="3703320"/>
+            <a:ext cx="11274552" cy="822960"/>
+          </a:xfrm>
+          <a:prstGeom prst="roundRect">
+            <a:avLst>
+              <a:gd name="adj" fmla="val 8889"/>
+            </a:avLst>
+          </a:prstGeom>
+          <a:solidFill>
+            <a:srgbClr val="151D2C"/>
+          </a:solidFill>
+          <a:ln w="12700">
+            <a:solidFill>
+              <a:srgbClr val="273349"/>
+            </a:solidFill>
+            <a:prstDash val="solid"/>
+          </a:ln>
+        </p:spPr>
+      </p:sp>
+      <p:sp>
+        <p:nvSpPr>
+          <p:cNvPr id="14" name="Text 12"/>
+          <p:cNvSpPr txBox="1"/>
+          <p:nvPr/>
+        </p:nvSpPr>
+        <p:spPr>
+          <a:xfrm>
+            <a:off x="731520" y="3776472"/>
+            <a:ext cx="4206240" cy="676656"/>
+          </a:xfrm>
+          <a:prstGeom prst="rect">
+            <a:avLst/>
+          </a:prstGeom>
+          <a:noFill/>
+          <a:ln/>
+        </p:spPr>
+        <p:txBody>
+          <a:bodyPr wrap="square" lIns="0" tIns="0" rIns="0" bIns="0" rtlCol="0" anchor="ctr"/>
+          <a:lstStyle/>
+          <a:p>
+            <a:pPr indent="0" marL="0">
+              <a:buNone/>
+            </a:pPr>
+            <a:r>
+              <a:rPr lang="en-US" sz="1450" b="1" dirty="0">
+                <a:solidFill>
+                  <a:srgbClr val="D9A23C"/>
+                </a:solidFill>
+                <a:latin typeface="Arial" pitchFamily="34" charset="0"/>
+                <a:ea typeface="Arial" pitchFamily="34" charset="-122"/>
+                <a:cs typeface="Arial" pitchFamily="34" charset="-120"/>
+              </a:rPr>
+              <a:t>Showroom / service</a:t>
+            </a:r>
+            <a:endParaRPr lang="en-US" sz="1450" dirty="0"/>
+          </a:p>
+        </p:txBody>
+      </p:sp>
+      <p:sp>
+        <p:nvSpPr>
+          <p:cNvPr id="15" name="Text 13"/>
+          <p:cNvSpPr txBox="1"/>
+          <p:nvPr/>
+        </p:nvSpPr>
+        <p:spPr>
+          <a:xfrm>
+            <a:off x="5120640" y="3776472"/>
+            <a:ext cx="6400800" cy="676656"/>
+          </a:xfrm>
+          <a:prstGeom prst="rect">
+            <a:avLst/>
+          </a:prstGeom>
+          <a:noFill/>
+          <a:ln/>
+        </p:spPr>
+        <p:txBody>
+          <a:bodyPr wrap="square" lIns="0" tIns="0" rIns="0" bIns="0" rtlCol="0" anchor="ctr"/>
+          <a:lstStyle/>
+          <a:p>
+            <a:pPr indent="0" marL="0">
+              <a:buNone/>
+            </a:pPr>
+            <a:r>
+              <a:rPr lang="en-US" sz="1250" dirty="0">
+                <a:solidFill>
+                  <a:srgbClr val="8B94A3"/>
+                </a:solidFill>
+                <a:latin typeface="Calibri" pitchFamily="34" charset="0"/>
+                <a:ea typeface="Calibri" pitchFamily="34" charset="-122"/>
+                <a:cs typeface="Calibri" pitchFamily="34" charset="-120"/>
+              </a:rPr>
+              <a:t>no counterfeit safety part reaches a vehicle; verified-channel sourcing for time-critical repairs</a:t>
+            </a:r>
+            <a:endParaRPr lang="en-US" sz="1250" dirty="0"/>
+          </a:p>
+        </p:txBody>
+      </p:sp>
+      <p:sp>
+        <p:nvSpPr>
+          <p:cNvPr id="16" name="Text 14"/>
+          <p:cNvSpPr txBox="1"/>
+          <p:nvPr/>
+        </p:nvSpPr>
+        <p:spPr>
+          <a:xfrm>
+            <a:off x="457200" y="4892040"/>
+            <a:ext cx="11274552" cy="1005840"/>
+          </a:xfrm>
+          <a:prstGeom prst="rect">
+            <a:avLst/>
+          </a:prstGeom>
+          <a:noFill/>
+          <a:ln/>
+        </p:spPr>
+        <p:txBody>
+          <a:bodyPr wrap="square" lIns="0" tIns="0" rIns="0" bIns="0" rtlCol="0" anchor="ctr"/>
+          <a:lstStyle/>
+          <a:p>
+            <a:pPr indent="0" marL="0">
+              <a:buNone/>
+            </a:pPr>
+            <a:r>
+              <a:rPr lang="en-US" sz="1450" b="1" dirty="0">
+                <a:solidFill>
+                  <a:srgbClr val="E8ECF1"/>
+                </a:solidFill>
+                <a:latin typeface="Calibri" pitchFamily="34" charset="0"/>
+                <a:ea typeface="Calibri" pitchFamily="34" charset="-122"/>
+                <a:cs typeface="Calibri" pitchFamily="34" charset="-120"/>
+              </a:rPr>
+              <a:t>Unit economics:  </a:t>
+            </a:r>
+            <a:pPr indent="0" marL="0">
+              <a:buNone/>
+            </a:pPr>
+            <a:r>
+              <a:rPr lang="en-US" sz="1450" dirty="0">
+                <a:solidFill>
+                  <a:srgbClr val="8B94A3"/>
+                </a:solidFill>
+                <a:latin typeface="Calibri" pitchFamily="34" charset="0"/>
+                <a:ea typeface="Calibri" pitchFamily="34" charset="-122"/>
+                <a:cs typeface="Calibri" pitchFamily="34" charset="-120"/>
+              </a:rPr>
+              <a:t>seconds of compute on one laptop per dossier — no per-lookup API fees, the registry is local — against the cost of one warranty claim, one channel audit, or one liability event on a failed brake part. Scales linearly; rules-only mode screens at full speed with no model at all.</a:t>
+            </a:r>
+            <a:endParaRPr lang="en-US" sz="1450" dirty="0"/>
+          </a:p>
+        </p:txBody>
+      </p:sp>
+    </p:spTree>
+  </p:cSld>
+  <p:clrMapOvr>
+    <a:masterClrMapping/>
+  </p:clrMapOvr>
+</p:sld>
+</file>
+
+<file path=ppt/slides/slide14.xml><?xml version="1.0" encoding="utf-8"?>
+<p:sld xmlns:a="http://schemas.openxmlformats.org/drawingml/2006/main" xmlns:r="http://schemas.openxmlformats.org/officeDocument/2006/relationships" xmlns:p="http://schemas.openxmlformats.org/presentationml/2006/main">
+  <p:cSld name="Slide 14">
+    <p:bg>
+      <p:bgPr>
+        <a:solidFill>
+          <a:srgbClr val="0B0E14"/>
+        </a:solidFill>
+      </p:bgPr>
+    </p:bg>
+    <p:spTree>
+      <p:nvGrpSpPr>
+        <p:cNvPr id="1" name=""/>
+        <p:cNvGrpSpPr/>
+        <p:nvPr/>
+      </p:nvGrpSpPr>
+      <p:grpSpPr>
+        <a:xfrm>
+          <a:off x="0" y="0"/>
+          <a:ext cx="0" cy="0"/>
+          <a:chOff x="0" y="0"/>
+          <a:chExt cx="0" cy="0"/>
+        </a:xfrm>
+      </p:grpSpPr>
+      <p:sp>
+        <p:nvSpPr>
+          <p:cNvPr id="2" name="Text 0"/>
+          <p:cNvSpPr txBox="1"/>
+          <p:nvPr/>
+        </p:nvSpPr>
+        <p:spPr>
+          <a:xfrm>
             <a:off x="457200" y="1417320"/>
             <a:ext cx="11274552" cy="457200"/>
           </a:xfrm>
@@ -4620,7 +6066,7 @@
                 <a:ea typeface="Calibri" pitchFamily="34" charset="-122"/>
                 <a:cs typeface="Calibri" pitchFamily="34" charset="-120"/>
               </a:rPr>
-              <a:t>18 deterministic checks against a real 3.67M-company MCA registry, offline</a:t>
+              <a:t>22 deterministic checks against a real 3.67M-company MCA registry, offline</a:t>
             </a:r>
             <a:endParaRPr lang="en-US" sz="1400" dirty="0"/>
           </a:p>
@@ -5799,7 +7245,7 @@
                 <a:ea typeface="Calibri" pitchFamily="34" charset="-122"/>
                 <a:cs typeface="Calibri" pitchFamily="34" charset="-120"/>
               </a:rPr>
-              <a:t>18 pure deterministic checks: checksums, date logic, registry cross-checks. Facts with one right answer never go to a model.</a:t>
+              <a:t>22 pure deterministic checks: checksums, date logic, registry cross-checks. Facts with one right answer never go to a model.</a:t>
             </a:r>
             <a:endParaRPr lang="en-US" sz="1150" dirty="0"/>
           </a:p>
@@ -9390,7 +10836,7 @@
                 <a:ea typeface="Calibri" pitchFamily="34" charset="-122"/>
                 <a:cs typeface="Calibri" pitchFamily="34" charset="-120"/>
               </a:rPr>
-              <a:t>Paste any documents as plain text — no format needed. The pipeline runs live: extraction, 18 checks, deliberation, verdict. We built for contradictions, not scenarios, so unseen input is the test we want.</a:t>
+              <a:t>Paste any documents as plain text — no format needed. The pipeline runs live: extraction, 22 checks, deliberation, verdict. We built for contradictions, not scenarios, so unseen input is the test we want.</a:t>
             </a:r>
             <a:endParaRPr lang="en-US" sz="1250" dirty="0"/>
           </a:p>
@@ -9578,7 +11024,7 @@
                 <a:ea typeface="Courier New" pitchFamily="34" charset="-122"/>
                 <a:cs typeface="Courier New" pitchFamily="34" charset="-120"/>
               </a:rPr>
-              <a:t>calibration</a:t>
+              <a:t>logistics physics</a:t>
             </a:r>
             <a:endParaRPr lang="en-US" sz="1000" dirty="0"/>
           </a:p>
@@ -9617,7 +11063,7 @@
                 <a:ea typeface="Arial" pitchFamily="34" charset="-122"/>
                 <a:cs typeface="Arial" pitchFamily="34" charset="-120"/>
               </a:rPr>
-              <a:t>Honest numbers, honestly framed</a:t>
+              <a:t>Impossible paper: the goods travel faster than the law allows</a:t>
             </a:r>
             <a:endParaRPr lang="en-US" sz="2800" dirty="0"/>
           </a:p>
@@ -9656,7 +11102,7 @@
                 <a:ea typeface="Calibri" pitchFamily="34" charset="-122"/>
                 <a:cs typeface="Calibri" pitchFamily="34" charset="-120"/>
               </a:rPr>
-              <a:t>Our 12-case pack is an adversarial regression suite — the real eval is the case you feed it</a:t>
+              <a:t>New dimension — the government's own logistics formulas, run offline</a:t>
             </a:r>
             <a:endParaRPr lang="en-US" sz="1500" dirty="0"/>
           </a:p>
@@ -9671,19 +11117,19 @@
         <p:spPr>
           <a:xfrm>
             <a:off x="457200" y="1783080"/>
-            <a:ext cx="3657600" cy="2011680"/>
+            <a:ext cx="3657600" cy="3383280"/>
           </a:xfrm>
           <a:prstGeom prst="roundRect">
             <a:avLst>
-              <a:gd name="adj" fmla="val 4545"/>
+              <a:gd name="adj" fmla="val 2703"/>
             </a:avLst>
           </a:prstGeom>
           <a:solidFill>
             <a:srgbClr val="151D2C"/>
           </a:solidFill>
-          <a:ln w="12700">
+          <a:ln w="19050">
             <a:solidFill>
-              <a:srgbClr val="273349"/>
+              <a:srgbClr val="F85149"/>
             </a:solidFill>
             <a:prstDash val="solid"/>
           </a:ln>
@@ -9698,33 +11144,33 @@
         <p:spPr>
           <a:xfrm>
             <a:off x="685800" y="2011680"/>
-            <a:ext cx="3200400" cy="868680"/>
-          </a:xfrm>
-          <a:prstGeom prst="rect">
-            <a:avLst/>
-          </a:prstGeom>
-          <a:noFill/>
-          <a:ln/>
-        </p:spPr>
-        <p:txBody>
-          <a:bodyPr wrap="square" lIns="0" tIns="0" rIns="0" bIns="0" rtlCol="0" anchor="ctr"/>
-          <a:lstStyle/>
-          <a:p>
-            <a:pPr indent="0" marL="0">
-              <a:buNone/>
-            </a:pPr>
-            <a:r>
-              <a:rPr lang="en-US" sz="4400" b="1" dirty="0">
-                <a:solidFill>
-                  <a:srgbClr val="3FB950"/>
-                </a:solidFill>
-                <a:latin typeface="Arial" pitchFamily="34" charset="0"/>
-                <a:ea typeface="Arial" pitchFamily="34" charset="-122"/>
-                <a:cs typeface="Arial" pitchFamily="34" charset="-120"/>
-              </a:rPr>
-              <a:t>12/12</a:t>
-            </a:r>
-            <a:endParaRPr lang="en-US" sz="4400" dirty="0"/>
+            <a:ext cx="3200400" cy="365760"/>
+          </a:xfrm>
+          <a:prstGeom prst="rect">
+            <a:avLst/>
+          </a:prstGeom>
+          <a:noFill/>
+          <a:ln/>
+        </p:spPr>
+        <p:txBody>
+          <a:bodyPr wrap="square" lIns="0" tIns="0" rIns="0" bIns="0" rtlCol="0" anchor="ctr"/>
+          <a:lstStyle/>
+          <a:p>
+            <a:pPr indent="0" marL="0">
+              <a:buNone/>
+            </a:pPr>
+            <a:r>
+              <a:rPr lang="en-US" sz="1300" b="1" spc="100" kern="0" dirty="0">
+                <a:solidFill>
+                  <a:srgbClr val="F85149"/>
+                </a:solidFill>
+                <a:latin typeface="Courier New" pitchFamily="34" charset="0"/>
+                <a:ea typeface="Courier New" pitchFamily="34" charset="-122"/>
+                <a:cs typeface="Courier New" pitchFamily="34" charset="-120"/>
+              </a:rPr>
+              <a:t>E-WAY BILL PHYSICS</a:t>
+            </a:r>
+            <a:endParaRPr lang="en-US" sz="1300" dirty="0"/>
           </a:p>
         </p:txBody>
       </p:sp>
@@ -9736,17 +11182,17 @@
         </p:nvSpPr>
         <p:spPr>
           <a:xfrm>
-            <a:off x="685800" y="2926080"/>
-            <a:ext cx="3200400" cy="777240"/>
-          </a:xfrm>
-          <a:prstGeom prst="rect">
-            <a:avLst/>
-          </a:prstGeom>
-          <a:noFill/>
-          <a:ln/>
-        </p:spPr>
-        <p:txBody>
-          <a:bodyPr wrap="square" lIns="0" tIns="0" rIns="0" bIns="0" rtlCol="0" anchor="ctr"/>
+            <a:off x="685800" y="2468880"/>
+            <a:ext cx="3200400" cy="2560320"/>
+          </a:xfrm>
+          <a:prstGeom prst="rect">
+            <a:avLst/>
+          </a:prstGeom>
+          <a:noFill/>
+          <a:ln/>
+        </p:spPr>
+        <p:txBody>
+          <a:bodyPr wrap="square" lIns="0" tIns="0" rIns="0" bIns="0" rtlCol="0" anchor="t"/>
           <a:lstStyle/>
           <a:p>
             <a:pPr indent="0" marL="0">
@@ -9755,13 +11201,59 @@
             <a:r>
               <a:rPr lang="en-US" sz="1250" dirty="0">
                 <a:solidFill>
-                  <a:srgbClr val="8B94A3"/>
+                  <a:srgbClr val="E8ECF1"/>
                 </a:solidFill>
                 <a:latin typeface="Calibri" pitchFamily="34" charset="0"/>
                 <a:ea typeface="Calibri" pitchFamily="34" charset="-122"/>
                 <a:cs typeface="Calibri" pitchFamily="34" charset="-120"/>
               </a:rPr>
-              <a:t>exact verdict + subtype — identical on mock AND the live LLM path, temperature 0</a:t>
+              <a:t>CGST Rule 138(10): one validity day per 200 km. Chennai to Delhi is 2,200 km — eleven days minimum.</a:t>
+            </a:r>
+            <a:endParaRPr lang="en-US" sz="1250" dirty="0"/>
+          </a:p>
+          <a:p>
+            <a:pPr indent="0" marL="0">
+              <a:buNone/>
+            </a:pPr>
+            <a:endParaRPr lang="en-US" sz="1250" dirty="0"/>
+          </a:p>
+          <a:p>
+            <a:pPr indent="0" marL="0">
+              <a:buNone/>
+            </a:pPr>
+            <a:r>
+              <a:rPr lang="en-US" sz="1250" dirty="0">
+                <a:solidFill>
+                  <a:srgbClr val="E8ECF1"/>
+                </a:solidFill>
+                <a:latin typeface="Calibri" pitchFamily="34" charset="0"/>
+                <a:ea typeface="Calibri" pitchFamily="34" charset="-122"/>
+                <a:cs typeface="Calibri" pitchFamily="34" charset="-120"/>
+              </a:rPr>
+              <a:t>This bill grants ONE.</a:t>
+            </a:r>
+            <a:endParaRPr lang="en-US" sz="1250" dirty="0"/>
+          </a:p>
+          <a:p>
+            <a:pPr indent="0" marL="0">
+              <a:buNone/>
+            </a:pPr>
+            <a:endParaRPr lang="en-US" sz="1250" dirty="0"/>
+          </a:p>
+          <a:p>
+            <a:pPr indent="0" marL="0">
+              <a:buNone/>
+            </a:pPr>
+            <a:r>
+              <a:rPr lang="en-US" sz="1250" dirty="0">
+                <a:solidFill>
+                  <a:srgbClr val="E8ECF1"/>
+                </a:solidFill>
+                <a:latin typeface="Calibri" pitchFamily="34" charset="0"/>
+                <a:ea typeface="Calibri" pitchFamily="34" charset="-122"/>
+                <a:cs typeface="Calibri" pitchFamily="34" charset="-120"/>
+              </a:rPr>
+              <a:t>As papered, the truck teleports. Lawful extensions exist — none is cited.</a:t>
             </a:r>
             <a:endParaRPr lang="en-US" sz="1250" dirty="0"/>
           </a:p>
@@ -9776,19 +11268,19 @@
         <p:spPr>
           <a:xfrm>
             <a:off x="4370832" y="1783080"/>
-            <a:ext cx="3657600" cy="2011680"/>
+            <a:ext cx="3657600" cy="3383280"/>
           </a:xfrm>
           <a:prstGeom prst="roundRect">
             <a:avLst>
-              <a:gd name="adj" fmla="val 4545"/>
+              <a:gd name="adj" fmla="val 2703"/>
             </a:avLst>
           </a:prstGeom>
           <a:solidFill>
             <a:srgbClr val="151D2C"/>
           </a:solidFill>
-          <a:ln w="12700">
+          <a:ln w="19050">
             <a:solidFill>
-              <a:srgbClr val="273349"/>
+              <a:srgbClr val="D9A23C"/>
             </a:solidFill>
             <a:prstDash val="solid"/>
           </a:ln>
@@ -9803,33 +11295,33 @@
         <p:spPr>
           <a:xfrm>
             <a:off x="4599432" y="2011680"/>
-            <a:ext cx="3200400" cy="868680"/>
-          </a:xfrm>
-          <a:prstGeom prst="rect">
-            <a:avLst/>
-          </a:prstGeom>
-          <a:noFill/>
-          <a:ln/>
-        </p:spPr>
-        <p:txBody>
-          <a:bodyPr wrap="square" lIns="0" tIns="0" rIns="0" bIns="0" rtlCol="0" anchor="ctr"/>
-          <a:lstStyle/>
-          <a:p>
-            <a:pPr indent="0" marL="0">
-              <a:buNone/>
-            </a:pPr>
-            <a:r>
-              <a:rPr lang="en-US" sz="4400" b="1" dirty="0">
+            <a:ext cx="3200400" cy="365760"/>
+          </a:xfrm>
+          <a:prstGeom prst="rect">
+            <a:avLst/>
+          </a:prstGeom>
+          <a:noFill/>
+          <a:ln/>
+        </p:spPr>
+        <p:txBody>
+          <a:bodyPr wrap="square" lIns="0" tIns="0" rIns="0" bIns="0" rtlCol="0" anchor="ctr"/>
+          <a:lstStyle/>
+          <a:p>
+            <a:pPr indent="0" marL="0">
+              <a:buNone/>
+            </a:pPr>
+            <a:r>
+              <a:rPr lang="en-US" sz="1300" b="1" spc="100" kern="0" dirty="0">
                 <a:solidFill>
                   <a:srgbClr val="D9A23C"/>
                 </a:solidFill>
-                <a:latin typeface="Arial" pitchFamily="34" charset="0"/>
-                <a:ea typeface="Arial" pitchFamily="34" charset="-122"/>
-                <a:cs typeface="Arial" pitchFamily="34" charset="-120"/>
-              </a:rPr>
-              <a:t>33%</a:t>
-            </a:r>
-            <a:endParaRPr lang="en-US" sz="4400" dirty="0"/>
+                <a:latin typeface="Courier New" pitchFamily="34" charset="0"/>
+                <a:ea typeface="Courier New" pitchFamily="34" charset="-122"/>
+                <a:cs typeface="Courier New" pitchFamily="34" charset="-120"/>
+              </a:rPr>
+              <a:t>HSN MIS-DECLARATION</a:t>
+            </a:r>
+            <a:endParaRPr lang="en-US" sz="1300" dirty="0"/>
           </a:p>
         </p:txBody>
       </p:sp>
@@ -9841,17 +11333,17 @@
         </p:nvSpPr>
         <p:spPr>
           <a:xfrm>
-            <a:off x="4599432" y="2926080"/>
-            <a:ext cx="3200400" cy="777240"/>
-          </a:xfrm>
-          <a:prstGeom prst="rect">
-            <a:avLst/>
-          </a:prstGeom>
-          <a:noFill/>
-          <a:ln/>
-        </p:spPr>
-        <p:txBody>
-          <a:bodyPr wrap="square" lIns="0" tIns="0" rIns="0" bIns="0" rtlCol="0" anchor="ctr"/>
+            <a:off x="4599432" y="2468880"/>
+            <a:ext cx="3200400" cy="2560320"/>
+          </a:xfrm>
+          <a:prstGeom prst="rect">
+            <a:avLst/>
+          </a:prstGeom>
+          <a:noFill/>
+          <a:ln/>
+        </p:spPr>
+        <p:txBody>
+          <a:bodyPr wrap="square" lIns="0" tIns="0" rIns="0" bIns="0" rtlCol="0" anchor="t"/>
           <a:lstStyle/>
           <a:p>
             <a:pPr indent="0" marL="0">
@@ -9860,13 +11352,36 @@
             <a:r>
               <a:rPr lang="en-US" sz="1250" dirty="0">
                 <a:solidFill>
-                  <a:srgbClr val="8B94A3"/>
+                  <a:srgbClr val="E8ECF1"/>
                 </a:solidFill>
                 <a:latin typeface="Calibri" pitchFamily="34" charset="0"/>
                 <a:ea typeface="Calibri" pitchFamily="34" charset="-122"/>
                 <a:cs typeface="Calibri" pitchFamily="34" charset="-120"/>
               </a:rPr>
-              <a:t>abstention rate — UNVERIFIABLE with a work order instead of a guess</a:t>
+              <a:t>Brake calipers belong under heading 8708. This invoice declares 8544 — insulated cable.</a:t>
+            </a:r>
+            <a:endParaRPr lang="en-US" sz="1250" dirty="0"/>
+          </a:p>
+          <a:p>
+            <a:pPr indent="0" marL="0">
+              <a:buNone/>
+            </a:pPr>
+            <a:endParaRPr lang="en-US" sz="1250" dirty="0"/>
+          </a:p>
+          <a:p>
+            <a:pPr indent="0" marL="0">
+              <a:buNone/>
+            </a:pPr>
+            <a:r>
+              <a:rPr lang="en-US" sz="1250" dirty="0">
+                <a:solidFill>
+                  <a:srgbClr val="E8ECF1"/>
+                </a:solidFill>
+                <a:latin typeface="Calibri" pitchFamily="34" charset="0"/>
+                <a:ea typeface="Calibri" pitchFamily="34" charset="-122"/>
+                <a:cs typeface="Calibri" pitchFamily="34" charset="-120"/>
+              </a:rPr>
+              <a:t>Mis-declared HSN is how counterfeit consignments dodge duty scrutiny and anti-dumping checks.</a:t>
             </a:r>
             <a:endParaRPr lang="en-US" sz="1250" dirty="0"/>
           </a:p>
@@ -9881,19 +11396,19 @@
         <p:spPr>
           <a:xfrm>
             <a:off x="8284464" y="1783080"/>
-            <a:ext cx="3657600" cy="2011680"/>
+            <a:ext cx="3657600" cy="3383280"/>
           </a:xfrm>
           <a:prstGeom prst="roundRect">
             <a:avLst>
-              <a:gd name="adj" fmla="val 4545"/>
+              <a:gd name="adj" fmla="val 2703"/>
             </a:avLst>
           </a:prstGeom>
           <a:solidFill>
             <a:srgbClr val="151D2C"/>
           </a:solidFill>
-          <a:ln w="12700">
+          <a:ln w="19050">
             <a:solidFill>
-              <a:srgbClr val="273349"/>
+              <a:srgbClr val="4D9FFF"/>
             </a:solidFill>
             <a:prstDash val="solid"/>
           </a:ln>
@@ -9908,33 +11423,33 @@
         <p:spPr>
           <a:xfrm>
             <a:off x="8513064" y="2011680"/>
-            <a:ext cx="3200400" cy="868680"/>
-          </a:xfrm>
-          <a:prstGeom prst="rect">
-            <a:avLst/>
-          </a:prstGeom>
-          <a:noFill/>
-          <a:ln/>
-        </p:spPr>
-        <p:txBody>
-          <a:bodyPr wrap="square" lIns="0" tIns="0" rIns="0" bIns="0" rtlCol="0" anchor="ctr"/>
-          <a:lstStyle/>
-          <a:p>
-            <a:pPr indent="0" marL="0">
-              <a:buNone/>
-            </a:pPr>
-            <a:r>
-              <a:rPr lang="en-US" sz="4400" b="1" dirty="0">
+            <a:ext cx="3200400" cy="365760"/>
+          </a:xfrm>
+          <a:prstGeom prst="rect">
+            <a:avLst/>
+          </a:prstGeom>
+          <a:noFill/>
+          <a:ln/>
+        </p:spPr>
+        <p:txBody>
+          <a:bodyPr wrap="square" lIns="0" tIns="0" rIns="0" bIns="0" rtlCol="0" anchor="ctr"/>
+          <a:lstStyle/>
+          <a:p>
+            <a:pPr indent="0" marL="0">
+              <a:buNone/>
+            </a:pPr>
+            <a:r>
+              <a:rPr lang="en-US" sz="1300" b="1" spc="100" kern="0" dirty="0">
                 <a:solidFill>
                   <a:srgbClr val="4D9FFF"/>
                 </a:solidFill>
-                <a:latin typeface="Arial" pitchFamily="34" charset="0"/>
-                <a:ea typeface="Arial" pitchFamily="34" charset="-122"/>
-                <a:cs typeface="Arial" pitchFamily="34" charset="-120"/>
-              </a:rPr>
-              <a:t>100%</a:t>
-            </a:r>
-            <a:endParaRPr lang="en-US" sz="4400" dirty="0"/>
+                <a:latin typeface="Courier New" pitchFamily="34" charset="0"/>
+                <a:ea typeface="Courier New" pitchFamily="34" charset="-122"/>
+                <a:cs typeface="Courier New" pitchFamily="34" charset="-120"/>
+              </a:rPr>
+              <a:t>ONE ENTRY, TWO STORIES</a:t>
+            </a:r>
+            <a:endParaRPr lang="en-US" sz="1300" dirty="0"/>
           </a:p>
         </p:txBody>
       </p:sp>
@@ -9946,17 +11461,17 @@
         </p:nvSpPr>
         <p:spPr>
           <a:xfrm>
-            <a:off x="8513064" y="2926080"/>
-            <a:ext cx="3200400" cy="777240"/>
-          </a:xfrm>
-          <a:prstGeom prst="rect">
-            <a:avLst/>
-          </a:prstGeom>
-          <a:noFill/>
-          <a:ln/>
-        </p:spPr>
-        <p:txBody>
-          <a:bodyPr wrap="square" lIns="0" tIns="0" rIns="0" bIns="0" rtlCol="0" anchor="ctr"/>
+            <a:off x="8513064" y="2468880"/>
+            <a:ext cx="3200400" cy="2560320"/>
+          </a:xfrm>
+          <a:prstGeom prst="rect">
+            <a:avLst/>
+          </a:prstGeom>
+          <a:noFill/>
+          <a:ln/>
+        </p:spPr>
+        <p:txBody>
+          <a:bodyPr wrap="square" lIns="0" tIns="0" rIns="0" bIns="0" rtlCol="0" anchor="t"/>
           <a:lstStyle/>
           <a:p>
             <a:pPr indent="0" marL="0">
@@ -9965,44 +11480,28 @@
             <a:r>
               <a:rPr lang="en-US" sz="1250" dirty="0">
                 <a:solidFill>
-                  <a:srgbClr val="8B94A3"/>
+                  <a:srgbClr val="E8ECF1"/>
                 </a:solidFill>
                 <a:latin typeface="Calibri" pitchFamily="34" charset="0"/>
                 <a:ea typeface="Calibri" pitchFamily="34" charset="-122"/>
                 <a:cs typeface="Calibri" pitchFamily="34" charset="-120"/>
               </a:rPr>
-              <a:t>accuracy when committed — every GENUINE / SUSPECT call correct</a:t>
+              <a:t>A consignment declaring first entry at a seaport, by air, is not a routing choice — it is two import stories for one crate.</a:t>
             </a:r>
             <a:endParaRPr lang="en-US" sz="1250" dirty="0"/>
           </a:p>
-        </p:txBody>
-      </p:sp>
-      <p:sp>
-        <p:nvSpPr>
-          <p:cNvPr id="16" name="Text 14"/>
-          <p:cNvSpPr txBox="1"/>
-          <p:nvPr/>
-        </p:nvSpPr>
-        <p:spPr>
-          <a:xfrm>
-            <a:off x="457200" y="4160520"/>
-            <a:ext cx="11274552" cy="914400"/>
-          </a:xfrm>
-          <a:prstGeom prst="rect">
-            <a:avLst/>
-          </a:prstGeom>
-          <a:noFill/>
-          <a:ln/>
-        </p:spPr>
-        <p:txBody>
-          <a:bodyPr wrap="square" lIns="0" tIns="0" rIns="0" bIns="0" rtlCol="0" anchor="ctr"/>
-          <a:lstStyle/>
-          <a:p>
-            <a:pPr indent="0" marL="0">
-              <a:buNone/>
-            </a:pPr>
-            <a:r>
-              <a:rPr lang="en-US" sz="1400" b="1" dirty="0">
+          <a:p>
+            <a:pPr indent="0" marL="0">
+              <a:buNone/>
+            </a:pPr>
+            <a:endParaRPr lang="en-US" sz="1250" dirty="0"/>
+          </a:p>
+          <a:p>
+            <a:pPr indent="0" marL="0">
+              <a:buNone/>
+            </a:pPr>
+            <a:r>
+              <a:rPr lang="en-US" sz="1250" dirty="0">
                 <a:solidFill>
                   <a:srgbClr val="E8ECF1"/>
                 </a:solidFill>
@@ -10010,62 +11509,48 @@
                 <a:ea typeface="Calibri" pitchFamily="34" charset="-122"/>
                 <a:cs typeface="Calibri" pitchFamily="34" charset="-120"/>
               </a:rPr>
-              <a:t>What the suite actually contains: </a:t>
-            </a:r>
-            <a:pPr indent="0" marL="0">
-              <a:buNone/>
-            </a:pPr>
-            <a:r>
-              <a:rPr lang="en-US" sz="1400" dirty="0">
-                <a:solidFill>
-                  <a:srgbClr val="8B94A3"/>
+              <a:t>Checked against a customs-station table, offline.</a:t>
+            </a:r>
+            <a:endParaRPr lang="en-US" sz="1250" dirty="0"/>
+          </a:p>
+        </p:txBody>
+      </p:sp>
+      <p:sp>
+        <p:nvSpPr>
+          <p:cNvPr id="16" name="Text 14"/>
+          <p:cNvSpPr txBox="1"/>
+          <p:nvPr/>
+        </p:nvSpPr>
+        <p:spPr>
+          <a:xfrm>
+            <a:off x="457200" y="5440680"/>
+            <a:ext cx="11274552" cy="457200"/>
+          </a:xfrm>
+          <a:prstGeom prst="rect">
+            <a:avLst/>
+          </a:prstGeom>
+          <a:noFill/>
+          <a:ln/>
+        </p:spPr>
+        <p:txBody>
+          <a:bodyPr wrap="square" lIns="0" tIns="0" rIns="0" bIns="0" rtlCol="0" anchor="ctr"/>
+          <a:lstStyle/>
+          <a:p>
+            <a:pPr indent="0" marL="0">
+              <a:buNone/>
+            </a:pPr>
+            <a:r>
+              <a:rPr lang="en-US" sz="1600" i="1" dirty="0">
+                <a:solidFill>
+                  <a:srgbClr val="4D9FFF"/>
                 </a:solidFill>
                 <a:latin typeface="Calibri" pitchFamily="34" charset="0"/>
                 <a:ea typeface="Calibri" pitchFamily="34" charset="-122"/>
                 <a:cs typeface="Calibri" pitchFamily="34" charset="-120"/>
               </a:rPr>
-              <a:t>a typo'd lot code the system must NOT flag, an injection dossier, an LLP that must trigger abstention not accusation, and a merger where the scary reading is wrong. Rules-only scores 11/12 — its one miss, over-accusing the merged supplier, is the measured proof of what stage 4 adds.</a:t>
-            </a:r>
-            <a:endParaRPr lang="en-US" sz="1400" dirty="0"/>
-          </a:p>
-        </p:txBody>
-      </p:sp>
-      <p:sp>
-        <p:nvSpPr>
-          <p:cNvPr id="17" name="Text 15"/>
-          <p:cNvSpPr txBox="1"/>
-          <p:nvPr/>
-        </p:nvSpPr>
-        <p:spPr>
-          <a:xfrm>
-            <a:off x="457200" y="5120640"/>
-            <a:ext cx="11274552" cy="822960"/>
-          </a:xfrm>
-          <a:prstGeom prst="rect">
-            <a:avLst/>
-          </a:prstGeom>
-          <a:noFill/>
-          <a:ln/>
-        </p:spPr>
-        <p:txBody>
-          <a:bodyPr wrap="square" lIns="0" tIns="0" rIns="0" bIns="0" rtlCol="0" anchor="ctr"/>
-          <a:lstStyle/>
-          <a:p>
-            <a:pPr indent="0" marL="0">
-              <a:buNone/>
-            </a:pPr>
-            <a:r>
-              <a:rPr lang="en-US" sz="1300" i="1" dirty="0">
-                <a:solidFill>
-                  <a:srgbClr val="5C6470"/>
-                </a:solidFill>
-                <a:latin typeface="Calibri" pitchFamily="34" charset="0"/>
-                <a:ea typeface="Calibri" pitchFamily="34" charset="-122"/>
-                <a:cs typeface="Calibri" pitchFamily="34" charset="-120"/>
-              </a:rPr>
-              <a:t>Who labeled the cases? We did — and we say so. No labeled corpus of counterfeit dossiers exists; that absence is part of this problem. 12/12 proves the pipeline matches its stated policy exactly. Field accuracy is a different claim, and we don't make it.</a:t>
-            </a:r>
-            <a:endParaRPr lang="en-US" sz="1300" dirty="0"/>
+              <a:t>Genuine goods obey physics. Forged paperwork doesn't have to — until something checks.</a:t>
+            </a:r>
+            <a:endParaRPr lang="en-US" sz="1600" dirty="0"/>
           </a:p>
         </p:txBody>
       </p:sp>
